--- a/exports/pptx/lessons/senior-module-15-project-implementation/day-01-overview-and-menu.pptx
+++ b/exports/pptx/lessons/senior-module-15-project-implementation/day-01-overview-and-menu.pptx
@@ -4265,7 +4265,7 @@
         <p:spPr>
           <a:xfrm>
             <a:off x="634901" y="883593"/>
-            <a:ext cx="8102798" cy="1462683"/>
+            <a:ext cx="8102798" cy="487561"/>
           </a:xfrm>
           <a:prstGeom prst="rect">
             <a:avLst/>
@@ -4296,7 +4296,7 @@
                 <a:ea typeface="Georgia" pitchFamily="34" charset="-122"/>
                 <a:cs typeface="Georgia" pitchFamily="34" charset="-120"/>
               </a:rPr>
-              <a:t>State the observable phenomenon first.</a:t>
+              <a:t>Capstone overview.</a:t>
             </a:r>
             <a:pPr algn="l" indent="0" marL="0">
               <a:lnSpc>
@@ -4316,10 +4316,32 @@
                 <a:ea typeface="Georgia" pitchFamily="34" charset="-122"/>
                 <a:cs typeface="Georgia" pitchFamily="34" charset="-120"/>
               </a:rPr>
-              <a:t> Whatever the day's idea is — a number trick, a celestial pattern, a herb's identifying feature — start with the thing students can see, hear, or do.</a:t>
+              <a:t> This module is different. No new content delivery. Instead: 10 days of structured project work, applying what you learned from Modules 1–14.</a:t>
             </a:r>
             <a:endParaRPr lang="en-US" sz="1200" dirty="0"/>
           </a:p>
+        </p:txBody>
+      </p:sp>
+      <p:sp>
+        <p:nvSpPr>
+          <p:cNvPr id="5" name="Text 3"/>
+          <p:cNvSpPr/>
+          <p:nvPr/>
+        </p:nvSpPr>
+        <p:spPr>
+          <a:xfrm>
+            <a:off x="634901" y="1472654"/>
+            <a:ext cx="8102798" cy="281880"/>
+          </a:xfrm>
+          <a:prstGeom prst="rect">
+            <a:avLst/>
+          </a:prstGeom>
+          <a:noFill/>
+          <a:ln/>
+        </p:spPr>
+        <p:txBody>
+          <a:bodyPr wrap="square" lIns="0" tIns="0" rIns="0" bIns="0" rtlCol="0" anchor="t"/>
+          <a:lstStyle/>
           <a:p>
             <a:pPr algn="l" marL="342900" indent="-342900">
               <a:lnSpc>
@@ -4340,7 +4362,7 @@
                 <a:ea typeface="Georgia" pitchFamily="34" charset="-122"/>
                 <a:cs typeface="Georgia" pitchFamily="34" charset="-120"/>
               </a:rPr>
-              <a:t>Introduce the Sanskrit term.</a:t>
+              <a:t>Walk through the 10-option project menu.</a:t>
             </a:r>
             <a:pPr algn="l" indent="0" marL="0">
               <a:lnSpc>
@@ -4360,10 +4382,80 @@
                 <a:ea typeface="Georgia" pitchFamily="34" charset="-122"/>
                 <a:cs typeface="Georgia" pitchFamily="34" charset="-120"/>
               </a:rPr>
-              <a:t> Once, in the triple format, then italicised only.</a:t>
+              <a:t> Read each, with a 1-minute description per option:</a:t>
             </a:r>
             <a:endParaRPr lang="en-US" sz="1200" dirty="0"/>
           </a:p>
+        </p:txBody>
+      </p:sp>
+      <p:sp>
+        <p:nvSpPr>
+          <p:cNvPr id="6" name="Text 4"/>
+          <p:cNvSpPr/>
+          <p:nvPr/>
+        </p:nvSpPr>
+        <p:spPr>
+          <a:xfrm>
+            <a:off x="406301" y="1843385"/>
+            <a:ext cx="8498026" cy="639812"/>
+          </a:xfrm>
+          <a:prstGeom prst="rect">
+            <a:avLst/>
+          </a:prstGeom>
+          <a:noFill/>
+          <a:ln/>
+        </p:spPr>
+        <p:txBody>
+          <a:bodyPr wrap="square" lIns="0" tIns="0" rIns="0" bIns="0" rtlCol="0" anchor="t"/>
+          <a:lstStyle/>
+          <a:p>
+            <a:pPr algn="l" indent="0" marL="0">
+              <a:lnSpc>
+                <a:spcPts val="1680"/>
+              </a:lnSpc>
+              <a:spcBef>
+                <a:spcPts val="300"/>
+              </a:spcBef>
+              <a:spcAft>
+                <a:spcPts val="300"/>
+              </a:spcAft>
+              <a:buNone/>
+            </a:pPr>
+            <a:r>
+              <a:rPr lang="en-US" sz="1200" dirty="0">
+                <a:solidFill>
+                  <a:srgbClr val="1A1A1A"/>
+                </a:solidFill>
+                <a:latin typeface="Georgia" pitchFamily="34" charset="0"/>
+                <a:ea typeface="Georgia" pitchFamily="34" charset="-122"/>
+                <a:cs typeface="Georgia" pitchFamily="34" charset="-120"/>
+              </a:rPr>
+              <a:t>– Pañcagavya kitchen science → SUBSTITUTED with fermented-foods study (safety)    – Mandala / Pṛthvī geometry    – Tithi/festival calendar    – Herb identification card-deck    – Magic-square art    – Yoga sequence design    – Sustainability audit    – Doshic self-study    – Multiplication-method comparison    – Open-design (your own)</a:t>
+            </a:r>
+            <a:endParaRPr lang="en-US" sz="1200" dirty="0"/>
+          </a:p>
+        </p:txBody>
+      </p:sp>
+      <p:sp>
+        <p:nvSpPr>
+          <p:cNvPr id="7" name="Text 5"/>
+          <p:cNvSpPr/>
+          <p:nvPr/>
+        </p:nvSpPr>
+        <p:spPr>
+          <a:xfrm>
+            <a:off x="634901" y="2572048"/>
+            <a:ext cx="8102798" cy="487561"/>
+          </a:xfrm>
+          <a:prstGeom prst="rect">
+            <a:avLst/>
+          </a:prstGeom>
+          <a:noFill/>
+          <a:ln/>
+        </p:spPr>
+        <p:txBody>
+          <a:bodyPr wrap="square" lIns="0" tIns="0" rIns="0" bIns="0" rtlCol="0" anchor="t"/>
+          <a:lstStyle/>
           <a:p>
             <a:pPr algn="l" marL="342900" indent="-342900">
               <a:lnSpc>
@@ -4384,7 +4476,7 @@
                 <a:ea typeface="Georgia" pitchFamily="34" charset="-122"/>
                 <a:cs typeface="Georgia" pitchFamily="34" charset="-120"/>
               </a:rPr>
-              <a:t>Build the conceptual map.</a:t>
+              <a:t>The discipline.</a:t>
             </a:r>
             <a:pPr algn="l" indent="0" marL="0">
               <a:lnSpc>
@@ -4404,10 +4496,32 @@
                 <a:ea typeface="Georgia" pitchFamily="34" charset="-122"/>
                 <a:cs typeface="Georgia" pitchFamily="34" charset="-120"/>
               </a:rPr>
-              <a:t> Connect today's idea to prior modules (especially Module 2 if applicable) and prior days.</a:t>
+              <a:t> Each project requires: scope, research, design, build, document, present. Daily journal. Source citations.</a:t>
             </a:r>
             <a:endParaRPr lang="en-US" sz="1200" dirty="0"/>
           </a:p>
+        </p:txBody>
+      </p:sp>
+      <p:sp>
+        <p:nvSpPr>
+          <p:cNvPr id="8" name="Text 6"/>
+          <p:cNvSpPr/>
+          <p:nvPr/>
+        </p:nvSpPr>
+        <p:spPr>
+          <a:xfrm>
+            <a:off x="634901" y="3161109"/>
+            <a:ext cx="8102798" cy="487561"/>
+          </a:xfrm>
+          <a:prstGeom prst="rect">
+            <a:avLst/>
+          </a:prstGeom>
+          <a:noFill/>
+          <a:ln/>
+        </p:spPr>
+        <p:txBody>
+          <a:bodyPr wrap="square" lIns="0" tIns="0" rIns="0" bIns="0" rtlCol="0" anchor="t"/>
+          <a:lstStyle/>
           <a:p>
             <a:pPr algn="l" marL="342900" indent="-342900">
               <a:lnSpc>
@@ -4428,7 +4542,7 @@
                 <a:ea typeface="Georgia" pitchFamily="34" charset="-122"/>
                 <a:cs typeface="Georgia" pitchFamily="34" charset="-120"/>
               </a:rPr>
-              <a:t>Work an example</a:t>
+              <a:t>The safety floor.</a:t>
             </a:r>
             <a:pPr algn="l" indent="0" marL="0">
               <a:lnSpc>
@@ -4448,10 +4562,32 @@
                 <a:ea typeface="Georgia" pitchFamily="34" charset="-122"/>
                 <a:cs typeface="Georgia" pitchFamily="34" charset="-120"/>
               </a:rPr>
-              <a:t> with the whole class on the board.</a:t>
+              <a:t> Pañcagavya — NEVER cow-urine ingestion in school. Use comparative fermented-foods study (curd, paneer, batter — biochemically interesting and safe).</a:t>
             </a:r>
             <a:endParaRPr lang="en-US" sz="1200" dirty="0"/>
           </a:p>
+        </p:txBody>
+      </p:sp>
+      <p:sp>
+        <p:nvSpPr>
+          <p:cNvPr id="9" name="Text 7"/>
+          <p:cNvSpPr/>
+          <p:nvPr/>
+        </p:nvSpPr>
+        <p:spPr>
+          <a:xfrm>
+            <a:off x="634901" y="3750171"/>
+            <a:ext cx="8102798" cy="487561"/>
+          </a:xfrm>
+          <a:prstGeom prst="rect">
+            <a:avLst/>
+          </a:prstGeom>
+          <a:noFill/>
+          <a:ln/>
+        </p:spPr>
+        <p:txBody>
+          <a:bodyPr wrap="square" lIns="0" tIns="0" rIns="0" bIns="0" rtlCol="0" anchor="t"/>
+          <a:lstStyle/>
           <a:p>
             <a:pPr algn="l" marL="342900" indent="-342900">
               <a:lnSpc>
@@ -4472,7 +4608,7 @@
                 <a:ea typeface="Georgia" pitchFamily="34" charset="-122"/>
                 <a:cs typeface="Georgia" pitchFamily="34" charset="-120"/>
               </a:rPr>
-              <a:t>Independent or paired practice</a:t>
+              <a:t>Today's task.</a:t>
             </a:r>
             <a:pPr algn="l" indent="0" marL="0">
               <a:lnSpc>
@@ -4492,7 +4628,7 @@
                 <a:ea typeface="Georgia" pitchFamily="34" charset="-122"/>
                 <a:cs typeface="Georgia" pitchFamily="34" charset="-120"/>
               </a:rPr>
-              <a:t> for ~5 minutes.</a:t>
+              <a:t> Read all 10 options in detail (printout provided). DON'T pick yet — sleep on it. Tomorrow you'll choose and scope.</a:t>
             </a:r>
             <a:endParaRPr lang="en-US" sz="1200" dirty="0"/>
           </a:p>
@@ -4500,7 +4636,7 @@
       </p:sp>
       <p:sp>
         <p:nvSpPr>
-          <p:cNvPr id="5" name="Text 3"/>
+          <p:cNvPr id="10" name="Text 8"/>
           <p:cNvSpPr/>
           <p:nvPr/>
         </p:nvSpPr>

--- a/exports/pptx/lessons/senior-module-15-project-implementation/day-01-overview-and-menu.pptx
+++ b/exports/pptx/lessons/senior-module-15-project-implementation/day-01-overview-and-menu.pptx
@@ -17,9 +17,13 @@
     <p:sldId id="265" r:id="rId11"/>
     <p:sldId id="266" r:id="rId12"/>
     <p:sldId id="267" r:id="rId13"/>
+    <p:sldId id="268" r:id="rId14"/>
+    <p:sldId id="269" r:id="rId15"/>
+    <p:sldId id="270" r:id="rId16"/>
+    <p:sldId id="271" r:id="rId17"/>
   </p:sldIdLst>
   <p:notesMasterIdLst>
-    <p:notesMasterId r:id="rId14"/>
+    <p:notesMasterId r:id="rId18"/>
   </p:notesMasterIdLst>
   <p:sldSz cx="9144000" cy="5143500"/>
   <p:notesSz cx="5143500" cy="9144000"/>
@@ -801,6 +805,358 @@
             <a:fld id="{F7021451-1387-4CA6-816F-3879F97B5CBC}" type="slidenum">
               <a:rPr lang="en-US"/>
               <a:t>12</a:t>
+            </a:fld>
+            <a:endParaRPr lang="en-US"/>
+          </a:p>
+        </p:txBody>
+      </p:sp>
+    </p:spTree>
+    <p:extLst>
+      <p:ext uri="{BB962C8B-B14F-4D97-AF65-F5344CB8AC3E}">
+        <p14:creationId xmlns:p14="http://schemas.microsoft.com/office/powerpoint/2010/main" val="1024086991"/>
+      </p:ext>
+    </p:extLst>
+  </p:cSld>
+  <p:clrMapOvr>
+    <a:masterClrMapping/>
+  </p:clrMapOvr>
+</p:notes>
+</file>
+
+<file path=ppt/notesSlides/notesSlide13.xml><?xml version="1.0" encoding="utf-8"?>
+<p:notes xmlns:a="http://schemas.openxmlformats.org/drawingml/2006/main" xmlns:r="http://schemas.openxmlformats.org/officeDocument/2006/relationships" xmlns:p="http://schemas.openxmlformats.org/presentationml/2006/main">
+  <p:cSld>
+    <p:spTree>
+      <p:nvGrpSpPr>
+        <p:cNvPr id="1" name=""/>
+        <p:cNvGrpSpPr/>
+        <p:nvPr/>
+      </p:nvGrpSpPr>
+      <p:grpSpPr>
+        <a:xfrm>
+          <a:off x="0" y="0"/>
+          <a:ext cx="0" cy="0"/>
+          <a:chOff x="0" y="0"/>
+          <a:chExt cx="0" cy="0"/>
+        </a:xfrm>
+      </p:grpSpPr>
+      <p:sp>
+        <p:nvSpPr>
+          <p:cNvPr id="2" name="Slide Image Placeholder 1"/>
+          <p:cNvSpPr>
+            <a:spLocks noGrp="1" noRot="1" noChangeAspect="1"/>
+          </p:cNvSpPr>
+          <p:nvPr>
+            <p:ph type="sldImg"/>
+          </p:nvPr>
+        </p:nvSpPr>
+        <p:spPr/>
+      </p:sp>
+      <p:sp>
+        <p:nvSpPr>
+          <p:cNvPr id="3" name="Notes Placeholder 2"/>
+          <p:cNvSpPr>
+            <a:spLocks noGrp="1"/>
+          </p:cNvSpPr>
+          <p:nvPr>
+            <p:ph type="body" idx="1"/>
+          </p:nvPr>
+        </p:nvSpPr>
+        <p:spPr/>
+        <p:txBody>
+          <a:bodyPr/>
+          <a:lstStyle/>
+          <a:p>
+            <a:r>
+              <a:rPr lang="en-US" dirty="0"/>
+              <a:t/>
+            </a:r>
+            <a:endParaRPr lang="en-US" dirty="0"/>
+          </a:p>
+        </p:txBody>
+      </p:sp>
+      <p:sp>
+        <p:nvSpPr>
+          <p:cNvPr id="4" name="Slide Number Placeholder 3"/>
+          <p:cNvSpPr>
+            <a:spLocks noGrp="1"/>
+          </p:cNvSpPr>
+          <p:nvPr>
+            <p:ph type="sldNum" sz="quarter" idx="10"/>
+          </p:nvPr>
+        </p:nvSpPr>
+        <p:spPr/>
+        <p:txBody>
+          <a:bodyPr/>
+          <a:lstStyle/>
+          <a:p>
+            <a:fld id="{F7021451-1387-4CA6-816F-3879F97B5CBC}" type="slidenum">
+              <a:rPr lang="en-US"/>
+              <a:t>13</a:t>
+            </a:fld>
+            <a:endParaRPr lang="en-US"/>
+          </a:p>
+        </p:txBody>
+      </p:sp>
+    </p:spTree>
+    <p:extLst>
+      <p:ext uri="{BB962C8B-B14F-4D97-AF65-F5344CB8AC3E}">
+        <p14:creationId xmlns:p14="http://schemas.microsoft.com/office/powerpoint/2010/main" val="1024086991"/>
+      </p:ext>
+    </p:extLst>
+  </p:cSld>
+  <p:clrMapOvr>
+    <a:masterClrMapping/>
+  </p:clrMapOvr>
+</p:notes>
+</file>
+
+<file path=ppt/notesSlides/notesSlide14.xml><?xml version="1.0" encoding="utf-8"?>
+<p:notes xmlns:a="http://schemas.openxmlformats.org/drawingml/2006/main" xmlns:r="http://schemas.openxmlformats.org/officeDocument/2006/relationships" xmlns:p="http://schemas.openxmlformats.org/presentationml/2006/main">
+  <p:cSld>
+    <p:spTree>
+      <p:nvGrpSpPr>
+        <p:cNvPr id="1" name=""/>
+        <p:cNvGrpSpPr/>
+        <p:nvPr/>
+      </p:nvGrpSpPr>
+      <p:grpSpPr>
+        <a:xfrm>
+          <a:off x="0" y="0"/>
+          <a:ext cx="0" cy="0"/>
+          <a:chOff x="0" y="0"/>
+          <a:chExt cx="0" cy="0"/>
+        </a:xfrm>
+      </p:grpSpPr>
+      <p:sp>
+        <p:nvSpPr>
+          <p:cNvPr id="2" name="Slide Image Placeholder 1"/>
+          <p:cNvSpPr>
+            <a:spLocks noGrp="1" noRot="1" noChangeAspect="1"/>
+          </p:cNvSpPr>
+          <p:nvPr>
+            <p:ph type="sldImg"/>
+          </p:nvPr>
+        </p:nvSpPr>
+        <p:spPr/>
+      </p:sp>
+      <p:sp>
+        <p:nvSpPr>
+          <p:cNvPr id="3" name="Notes Placeholder 2"/>
+          <p:cNvSpPr>
+            <a:spLocks noGrp="1"/>
+          </p:cNvSpPr>
+          <p:nvPr>
+            <p:ph type="body" idx="1"/>
+          </p:nvPr>
+        </p:nvSpPr>
+        <p:spPr/>
+        <p:txBody>
+          <a:bodyPr/>
+          <a:lstStyle/>
+          <a:p>
+            <a:r>
+              <a:rPr lang="en-US" dirty="0"/>
+              <a:t/>
+            </a:r>
+            <a:endParaRPr lang="en-US" dirty="0"/>
+          </a:p>
+        </p:txBody>
+      </p:sp>
+      <p:sp>
+        <p:nvSpPr>
+          <p:cNvPr id="4" name="Slide Number Placeholder 3"/>
+          <p:cNvSpPr>
+            <a:spLocks noGrp="1"/>
+          </p:cNvSpPr>
+          <p:nvPr>
+            <p:ph type="sldNum" sz="quarter" idx="10"/>
+          </p:nvPr>
+        </p:nvSpPr>
+        <p:spPr/>
+        <p:txBody>
+          <a:bodyPr/>
+          <a:lstStyle/>
+          <a:p>
+            <a:fld id="{F7021451-1387-4CA6-816F-3879F97B5CBC}" type="slidenum">
+              <a:rPr lang="en-US"/>
+              <a:t>14</a:t>
+            </a:fld>
+            <a:endParaRPr lang="en-US"/>
+          </a:p>
+        </p:txBody>
+      </p:sp>
+    </p:spTree>
+    <p:extLst>
+      <p:ext uri="{BB962C8B-B14F-4D97-AF65-F5344CB8AC3E}">
+        <p14:creationId xmlns:p14="http://schemas.microsoft.com/office/powerpoint/2010/main" val="1024086991"/>
+      </p:ext>
+    </p:extLst>
+  </p:cSld>
+  <p:clrMapOvr>
+    <a:masterClrMapping/>
+  </p:clrMapOvr>
+</p:notes>
+</file>
+
+<file path=ppt/notesSlides/notesSlide15.xml><?xml version="1.0" encoding="utf-8"?>
+<p:notes xmlns:a="http://schemas.openxmlformats.org/drawingml/2006/main" xmlns:r="http://schemas.openxmlformats.org/officeDocument/2006/relationships" xmlns:p="http://schemas.openxmlformats.org/presentationml/2006/main">
+  <p:cSld>
+    <p:spTree>
+      <p:nvGrpSpPr>
+        <p:cNvPr id="1" name=""/>
+        <p:cNvGrpSpPr/>
+        <p:nvPr/>
+      </p:nvGrpSpPr>
+      <p:grpSpPr>
+        <a:xfrm>
+          <a:off x="0" y="0"/>
+          <a:ext cx="0" cy="0"/>
+          <a:chOff x="0" y="0"/>
+          <a:chExt cx="0" cy="0"/>
+        </a:xfrm>
+      </p:grpSpPr>
+      <p:sp>
+        <p:nvSpPr>
+          <p:cNvPr id="2" name="Slide Image Placeholder 1"/>
+          <p:cNvSpPr>
+            <a:spLocks noGrp="1" noRot="1" noChangeAspect="1"/>
+          </p:cNvSpPr>
+          <p:nvPr>
+            <p:ph type="sldImg"/>
+          </p:nvPr>
+        </p:nvSpPr>
+        <p:spPr/>
+      </p:sp>
+      <p:sp>
+        <p:nvSpPr>
+          <p:cNvPr id="3" name="Notes Placeholder 2"/>
+          <p:cNvSpPr>
+            <a:spLocks noGrp="1"/>
+          </p:cNvSpPr>
+          <p:nvPr>
+            <p:ph type="body" idx="1"/>
+          </p:nvPr>
+        </p:nvSpPr>
+        <p:spPr/>
+        <p:txBody>
+          <a:bodyPr/>
+          <a:lstStyle/>
+          <a:p>
+            <a:r>
+              <a:rPr lang="en-US" dirty="0"/>
+              <a:t/>
+            </a:r>
+            <a:endParaRPr lang="en-US" dirty="0"/>
+          </a:p>
+        </p:txBody>
+      </p:sp>
+      <p:sp>
+        <p:nvSpPr>
+          <p:cNvPr id="4" name="Slide Number Placeholder 3"/>
+          <p:cNvSpPr>
+            <a:spLocks noGrp="1"/>
+          </p:cNvSpPr>
+          <p:nvPr>
+            <p:ph type="sldNum" sz="quarter" idx="10"/>
+          </p:nvPr>
+        </p:nvSpPr>
+        <p:spPr/>
+        <p:txBody>
+          <a:bodyPr/>
+          <a:lstStyle/>
+          <a:p>
+            <a:fld id="{F7021451-1387-4CA6-816F-3879F97B5CBC}" type="slidenum">
+              <a:rPr lang="en-US"/>
+              <a:t>15</a:t>
+            </a:fld>
+            <a:endParaRPr lang="en-US"/>
+          </a:p>
+        </p:txBody>
+      </p:sp>
+    </p:spTree>
+    <p:extLst>
+      <p:ext uri="{BB962C8B-B14F-4D97-AF65-F5344CB8AC3E}">
+        <p14:creationId xmlns:p14="http://schemas.microsoft.com/office/powerpoint/2010/main" val="1024086991"/>
+      </p:ext>
+    </p:extLst>
+  </p:cSld>
+  <p:clrMapOvr>
+    <a:masterClrMapping/>
+  </p:clrMapOvr>
+</p:notes>
+</file>
+
+<file path=ppt/notesSlides/notesSlide16.xml><?xml version="1.0" encoding="utf-8"?>
+<p:notes xmlns:a="http://schemas.openxmlformats.org/drawingml/2006/main" xmlns:r="http://schemas.openxmlformats.org/officeDocument/2006/relationships" xmlns:p="http://schemas.openxmlformats.org/presentationml/2006/main">
+  <p:cSld>
+    <p:spTree>
+      <p:nvGrpSpPr>
+        <p:cNvPr id="1" name=""/>
+        <p:cNvGrpSpPr/>
+        <p:nvPr/>
+      </p:nvGrpSpPr>
+      <p:grpSpPr>
+        <a:xfrm>
+          <a:off x="0" y="0"/>
+          <a:ext cx="0" cy="0"/>
+          <a:chOff x="0" y="0"/>
+          <a:chExt cx="0" cy="0"/>
+        </a:xfrm>
+      </p:grpSpPr>
+      <p:sp>
+        <p:nvSpPr>
+          <p:cNvPr id="2" name="Slide Image Placeholder 1"/>
+          <p:cNvSpPr>
+            <a:spLocks noGrp="1" noRot="1" noChangeAspect="1"/>
+          </p:cNvSpPr>
+          <p:nvPr>
+            <p:ph type="sldImg"/>
+          </p:nvPr>
+        </p:nvSpPr>
+        <p:spPr/>
+      </p:sp>
+      <p:sp>
+        <p:nvSpPr>
+          <p:cNvPr id="3" name="Notes Placeholder 2"/>
+          <p:cNvSpPr>
+            <a:spLocks noGrp="1"/>
+          </p:cNvSpPr>
+          <p:nvPr>
+            <p:ph type="body" idx="1"/>
+          </p:nvPr>
+        </p:nvSpPr>
+        <p:spPr/>
+        <p:txBody>
+          <a:bodyPr/>
+          <a:lstStyle/>
+          <a:p>
+            <a:r>
+              <a:rPr lang="en-US" dirty="0"/>
+              <a:t/>
+            </a:r>
+            <a:endParaRPr lang="en-US" dirty="0"/>
+          </a:p>
+        </p:txBody>
+      </p:sp>
+      <p:sp>
+        <p:nvSpPr>
+          <p:cNvPr id="4" name="Slide Number Placeholder 3"/>
+          <p:cNvSpPr>
+            <a:spLocks noGrp="1"/>
+          </p:cNvSpPr>
+          <p:nvPr>
+            <p:ph type="sldNum" sz="quarter" idx="10"/>
+          </p:nvPr>
+        </p:nvSpPr>
+        <p:spPr/>
+        <p:txBody>
+          <a:bodyPr/>
+          <a:lstStyle/>
+          <a:p>
+            <a:fld id="{F7021451-1387-4CA6-816F-3879F97B5CBC}" type="slidenum">
+              <a:rPr lang="en-US"/>
+              <a:t>16</a:t>
             </a:fld>
             <a:endParaRPr lang="en-US"/>
           </a:p>
@@ -2100,102 +2456,6 @@
         </p:nvSpPr>
         <p:spPr>
           <a:xfrm>
-            <a:off x="406301" y="1223963"/>
-            <a:ext cx="8498026" cy="274290"/>
-          </a:xfrm>
-          <a:prstGeom prst="rect">
-            <a:avLst/>
-          </a:prstGeom>
-          <a:noFill/>
-          <a:ln/>
-        </p:spPr>
-        <p:txBody>
-          <a:bodyPr wrap="square" lIns="0" tIns="0" rIns="0" bIns="0" rtlCol="0" anchor="t"/>
-          <a:lstStyle/>
-          <a:p>
-            <a:pPr algn="l" indent="0" marL="0">
-              <a:lnSpc>
-                <a:spcPts val="2160"/>
-              </a:lnSpc>
-              <a:spcBef>
-                <a:spcPts val="600"/>
-              </a:spcBef>
-              <a:spcAft>
-                <a:spcPts val="800"/>
-              </a:spcAft>
-              <a:buNone/>
-            </a:pPr>
-            <a:r>
-              <a:rPr lang="en-US" sz="1800" b="1" dirty="0">
-                <a:solidFill>
-                  <a:srgbClr val="997929"/>
-                </a:solidFill>
-                <a:latin typeface="Times New Roman" pitchFamily="34" charset="0"/>
-                <a:ea typeface="Times New Roman" pitchFamily="34" charset="-122"/>
-                <a:cs typeface="Times New Roman" pitchFamily="34" charset="-120"/>
-              </a:rPr>
-              <a:t>Learning objective</a:t>
-            </a:r>
-            <a:endParaRPr lang="en-US" sz="1800" dirty="0"/>
-          </a:p>
-        </p:txBody>
-      </p:sp>
-      <p:sp>
-        <p:nvSpPr>
-          <p:cNvPr id="6" name="Text 4"/>
-          <p:cNvSpPr/>
-          <p:nvPr/>
-        </p:nvSpPr>
-        <p:spPr>
-          <a:xfrm>
-            <a:off x="406301" y="1637854"/>
-            <a:ext cx="8498026" cy="213271"/>
-          </a:xfrm>
-          <a:prstGeom prst="rect">
-            <a:avLst/>
-          </a:prstGeom>
-          <a:noFill/>
-          <a:ln/>
-        </p:spPr>
-        <p:txBody>
-          <a:bodyPr wrap="square" lIns="0" tIns="0" rIns="0" bIns="0" rtlCol="0" anchor="t"/>
-          <a:lstStyle/>
-          <a:p>
-            <a:pPr algn="l" indent="0" marL="0">
-              <a:lnSpc>
-                <a:spcPts val="1680"/>
-              </a:lnSpc>
-              <a:spcBef>
-                <a:spcPts val="300"/>
-              </a:spcBef>
-              <a:spcAft>
-                <a:spcPts val="300"/>
-              </a:spcAft>
-              <a:buNone/>
-            </a:pPr>
-            <a:r>
-              <a:rPr lang="en-US" sz="1200" dirty="0">
-                <a:solidFill>
-                  <a:srgbClr val="1A1A1A"/>
-                </a:solidFill>
-                <a:latin typeface="Georgia" pitchFamily="34" charset="0"/>
-                <a:ea typeface="Georgia" pitchFamily="34" charset="-122"/>
-                <a:cs typeface="Georgia" pitchFamily="34" charset="-120"/>
-              </a:rPr>
-              <a:t>By the end of this lesson, students will: review the 10-option project menu; pick a project.</a:t>
-            </a:r>
-            <a:endParaRPr lang="en-US" sz="1200" dirty="0"/>
-          </a:p>
-        </p:txBody>
-      </p:sp>
-      <p:sp>
-        <p:nvSpPr>
-          <p:cNvPr id="7" name="Text 5"/>
-          <p:cNvSpPr/>
-          <p:nvPr/>
-        </p:nvSpPr>
-        <p:spPr>
-          <a:xfrm>
             <a:off x="406301" y="4434929"/>
             <a:ext cx="8498026" cy="213271"/>
           </a:xfrm>
@@ -2340,7 +2600,7 @@
                 <a:ea typeface="Times New Roman" pitchFamily="34" charset="-122"/>
                 <a:cs typeface="Times New Roman" pitchFamily="34" charset="-120"/>
               </a:rPr>
-              <a:t>Homework</a:t>
+              <a:t>Core (20 min) (cont.)</a:t>
             </a:r>
             <a:endParaRPr lang="en-US" sz="1800" dirty="0"/>
           </a:p>
@@ -2354,8 +2614,8 @@
         </p:nvSpPr>
         <p:spPr>
           <a:xfrm>
-            <a:off x="406301" y="870942"/>
-            <a:ext cx="8498026" cy="222796"/>
+            <a:off x="634901" y="883593"/>
+            <a:ext cx="8102798" cy="525661"/>
           </a:xfrm>
           <a:prstGeom prst="rect">
             <a:avLst/>
@@ -2367,13 +2627,101 @@
           <a:bodyPr wrap="square" lIns="0" tIns="0" rIns="0" bIns="0" rtlCol="0" anchor="t"/>
           <a:lstStyle/>
           <a:p>
+            <a:pPr algn="l" marL="342900" indent="-342900">
+              <a:lnSpc>
+                <a:spcPts val="1620"/>
+              </a:lnSpc>
+              <a:spcAft>
+                <a:spcPts val="300"/>
+              </a:spcAft>
+              <a:buSzPct val="100000"/>
+              <a:buChar char="•"/>
+            </a:pPr>
+            <a:r>
+              <a:rPr lang="en-US" sz="1200" dirty="0">
+                <a:solidFill>
+                  <a:srgbClr val="1A1A1A"/>
+                </a:solidFill>
+                <a:latin typeface="Georgia" pitchFamily="34" charset="0"/>
+                <a:ea typeface="Georgia" pitchFamily="34" charset="-122"/>
+                <a:cs typeface="Georgia" pitchFamily="34" charset="-120"/>
+              </a:rPr>
+              <a:t>Multiplication-method comparison</a:t>
+            </a:r>
+            <a:endParaRPr lang="en-US" sz="1200" dirty="0"/>
+          </a:p>
+          <a:p>
+            <a:pPr algn="l" marL="342900" indent="-342900">
+              <a:lnSpc>
+                <a:spcPts val="1620"/>
+              </a:lnSpc>
+              <a:spcAft>
+                <a:spcPts val="300"/>
+              </a:spcAft>
+              <a:buSzPct val="100000"/>
+              <a:buChar char="•"/>
+            </a:pPr>
+            <a:r>
+              <a:rPr lang="en-US" sz="1200" dirty="0">
+                <a:solidFill>
+                  <a:srgbClr val="1A1A1A"/>
+                </a:solidFill>
+                <a:latin typeface="Georgia" pitchFamily="34" charset="0"/>
+                <a:ea typeface="Georgia" pitchFamily="34" charset="-122"/>
+                <a:cs typeface="Georgia" pitchFamily="34" charset="-120"/>
+              </a:rPr>
+              <a:t>Open-design (your own)</a:t>
+            </a:r>
+            <a:endParaRPr lang="en-US" sz="1200" dirty="0"/>
+          </a:p>
+        </p:txBody>
+      </p:sp>
+      <p:sp>
+        <p:nvSpPr>
+          <p:cNvPr id="5" name="Text 3"/>
+          <p:cNvSpPr/>
+          <p:nvPr/>
+        </p:nvSpPr>
+        <p:spPr>
+          <a:xfrm>
+            <a:off x="634901" y="1510754"/>
+            <a:ext cx="8102798" cy="487561"/>
+          </a:xfrm>
+          <a:prstGeom prst="rect">
+            <a:avLst/>
+          </a:prstGeom>
+          <a:noFill/>
+          <a:ln/>
+        </p:spPr>
+        <p:txBody>
+          <a:bodyPr wrap="square" lIns="0" tIns="0" rIns="0" bIns="0" rtlCol="0" anchor="t"/>
+          <a:lstStyle/>
+          <a:p>
+            <a:pPr algn="l" marL="342900" indent="-342900">
+              <a:lnSpc>
+                <a:spcPts val="1620"/>
+              </a:lnSpc>
+              <a:spcAft>
+                <a:spcPts val="300"/>
+              </a:spcAft>
+              <a:buSzPct val="100000"/>
+              <a:buChar char="•"/>
+            </a:pPr>
+            <a:r>
+              <a:rPr lang="en-US" sz="1200" b="1" dirty="0">
+                <a:solidFill>
+                  <a:srgbClr val="1A1A1A"/>
+                </a:solidFill>
+                <a:latin typeface="Georgia" pitchFamily="34" charset="0"/>
+                <a:ea typeface="Georgia" pitchFamily="34" charset="-122"/>
+                <a:cs typeface="Georgia" pitchFamily="34" charset="-120"/>
+              </a:rPr>
+              <a:t>The discipline.</a:t>
+            </a:r>
             <a:pPr algn="l" indent="0" marL="0">
               <a:lnSpc>
-                <a:spcPts val="1680"/>
-              </a:lnSpc>
-              <a:spcBef>
-                <a:spcPts val="300"/>
-              </a:spcBef>
+                <a:spcPts val="1620"/>
+              </a:lnSpc>
               <a:spcAft>
                 <a:spcPts val="300"/>
               </a:spcAft>
@@ -2388,53 +2736,7 @@
                 <a:ea typeface="Georgia" pitchFamily="34" charset="-122"/>
                 <a:cs typeface="Georgia" pitchFamily="34" charset="-120"/>
               </a:rPr>
-              <a:t>(See </a:t>
-            </a:r>
-            <a:pPr algn="l" indent="0" marL="0">
-              <a:lnSpc>
-                <a:spcPts val="1680"/>
-              </a:lnSpc>
-              <a:spcBef>
-                <a:spcPts val="300"/>
-              </a:spcBef>
-              <a:spcAft>
-                <a:spcPts val="300"/>
-              </a:spcAft>
-              <a:buNone/>
-            </a:pPr>
-            <a:r>
-              <a:rPr lang="en-US" sz="1200" dirty="0">
-                <a:solidFill>
-                  <a:srgbClr val="1A1A1A"/>
-                </a:solidFill>
-                <a:latin typeface="Georgia" pitchFamily="34" charset="0"/>
-                <a:ea typeface="Georgia" pitchFamily="34" charset="-122"/>
-                <a:cs typeface="Georgia" pitchFamily="34" charset="-120"/>
-              </a:rPr>
-              <a:t>homework.md</a:t>
-            </a:r>
-            <a:pPr algn="l" indent="0" marL="0">
-              <a:lnSpc>
-                <a:spcPts val="1680"/>
-              </a:lnSpc>
-              <a:spcBef>
-                <a:spcPts val="300"/>
-              </a:spcBef>
-              <a:spcAft>
-                <a:spcPts val="300"/>
-              </a:spcAft>
-              <a:buNone/>
-            </a:pPr>
-            <a:r>
-              <a:rPr lang="en-US" sz="1200" dirty="0">
-                <a:solidFill>
-                  <a:srgbClr val="1A1A1A"/>
-                </a:solidFill>
-                <a:latin typeface="Georgia" pitchFamily="34" charset="0"/>
-                <a:ea typeface="Georgia" pitchFamily="34" charset="-122"/>
-                <a:cs typeface="Georgia" pitchFamily="34" charset="-120"/>
-              </a:rPr>
-              <a:t> for today's task.)</a:t>
+              <a:t> Each project requires: scope, research, design, build, document, present. Daily journal. Source citations.</a:t>
             </a:r>
             <a:endParaRPr lang="en-US" sz="1200" dirty="0"/>
           </a:p>
@@ -2442,7 +2744,7 @@
       </p:sp>
       <p:sp>
         <p:nvSpPr>
-          <p:cNvPr id="5" name="Text 3"/>
+          <p:cNvPr id="6" name="Text 4"/>
           <p:cNvSpPr/>
           <p:nvPr/>
         </p:nvSpPr>
@@ -2592,7 +2894,7 @@
                 <a:ea typeface="Times New Roman" pitchFamily="34" charset="-122"/>
                 <a:cs typeface="Times New Roman" pitchFamily="34" charset="-120"/>
               </a:rPr>
-              <a:t>Differentiation</a:t>
+              <a:t>Core (20 min) (cont.)</a:t>
             </a:r>
             <a:endParaRPr lang="en-US" sz="1800" dirty="0"/>
           </a:p>
@@ -2607,7 +2909,7 @@
         <p:spPr>
           <a:xfrm>
             <a:off x="634901" y="883593"/>
-            <a:ext cx="8102798" cy="525661"/>
+            <a:ext cx="8102798" cy="487561"/>
           </a:xfrm>
           <a:prstGeom prst="rect">
             <a:avLst/>
@@ -2638,7 +2940,7 @@
                 <a:ea typeface="Georgia" pitchFamily="34" charset="-122"/>
                 <a:cs typeface="Georgia" pitchFamily="34" charset="-120"/>
               </a:rPr>
-              <a:t>Extension:</a:t>
+              <a:t>The safety floor.</a:t>
             </a:r>
             <a:pPr algn="l" indent="0" marL="0">
               <a:lnSpc>
@@ -2658,10 +2960,32 @@
                 <a:ea typeface="Georgia" pitchFamily="34" charset="-122"/>
                 <a:cs typeface="Georgia" pitchFamily="34" charset="-120"/>
               </a:rPr>
-              <a:t> offer one open question or extra problem for fast finishers.</a:t>
+              <a:t> Pañcagavya — NEVER cow-urine ingestion in school. Use comparative fermented-foods study (curd, paneer, batter — biochemically interesting and safe).</a:t>
             </a:r>
             <a:endParaRPr lang="en-US" sz="1200" dirty="0"/>
           </a:p>
+        </p:txBody>
+      </p:sp>
+      <p:sp>
+        <p:nvSpPr>
+          <p:cNvPr id="5" name="Text 3"/>
+          <p:cNvSpPr/>
+          <p:nvPr/>
+        </p:nvSpPr>
+        <p:spPr>
+          <a:xfrm>
+            <a:off x="634901" y="1472654"/>
+            <a:ext cx="8102798" cy="487561"/>
+          </a:xfrm>
+          <a:prstGeom prst="rect">
+            <a:avLst/>
+          </a:prstGeom>
+          <a:noFill/>
+          <a:ln/>
+        </p:spPr>
+        <p:txBody>
+          <a:bodyPr wrap="square" lIns="0" tIns="0" rIns="0" bIns="0" rtlCol="0" anchor="t"/>
+          <a:lstStyle/>
           <a:p>
             <a:pPr algn="l" marL="342900" indent="-342900">
               <a:lnSpc>
@@ -2682,7 +3006,7 @@
                 <a:ea typeface="Georgia" pitchFamily="34" charset="-122"/>
                 <a:cs typeface="Georgia" pitchFamily="34" charset="-120"/>
               </a:rPr>
-              <a:t>Support:</a:t>
+              <a:t>Today's task.</a:t>
             </a:r>
             <a:pPr algn="l" indent="0" marL="0">
               <a:lnSpc>
@@ -2702,7 +3026,7 @@
                 <a:ea typeface="Georgia" pitchFamily="34" charset="-122"/>
                 <a:cs typeface="Georgia" pitchFamily="34" charset="-120"/>
               </a:rPr>
-              <a:t> pair students who need scaffolds; offer partial outlines.</a:t>
+              <a:t> Read all 10 options in detail (printout provided). DON'T pick yet — sleep on it. Tomorrow you'll choose and scope.</a:t>
             </a:r>
             <a:endParaRPr lang="en-US" sz="1200" dirty="0"/>
           </a:p>
@@ -2710,7 +3034,7 @@
       </p:sp>
       <p:sp>
         <p:nvSpPr>
-          <p:cNvPr id="5" name="Text 3"/>
+          <p:cNvPr id="6" name="Text 4"/>
           <p:cNvSpPr/>
           <p:nvPr/>
         </p:nvSpPr>
@@ -2860,7 +3184,7 @@
                 <a:ea typeface="Times New Roman" pitchFamily="34" charset="-122"/>
                 <a:cs typeface="Times New Roman" pitchFamily="34" charset="-120"/>
               </a:rPr>
-              <a:t>Teacher notes</a:t>
+              <a:t>Activity (15 min)</a:t>
             </a:r>
             <a:endParaRPr lang="en-US" sz="1800" dirty="0"/>
           </a:p>
@@ -2875,7 +3199,7 @@
         <p:spPr>
           <a:xfrm>
             <a:off x="406301" y="870942"/>
-            <a:ext cx="8498026" cy="426541"/>
+            <a:ext cx="8498026" cy="436066"/>
           </a:xfrm>
           <a:prstGeom prst="rect">
             <a:avLst/>
@@ -2908,7 +3232,1095 @@
                 <a:ea typeface="Georgia" pitchFamily="34" charset="-122"/>
                 <a:cs typeface="Georgia" pitchFamily="34" charset="-120"/>
               </a:rPr>
-              <a:t>– Citations: at least one quoted verse with citation per module. Day 1 already includes one if applicable; you may add more. – Connect to prior modules where natural (especially Module 2 pañcabhūta).</a:t>
+              <a:t>A scaled version of </a:t>
+            </a:r>
+            <a:pPr algn="l" indent="0" marL="0">
+              <a:lnSpc>
+                <a:spcPts val="1680"/>
+              </a:lnSpc>
+              <a:spcBef>
+                <a:spcPts val="300"/>
+              </a:spcBef>
+              <a:spcAft>
+                <a:spcPts val="300"/>
+              </a:spcAft>
+              <a:buNone/>
+            </a:pPr>
+            <a:r>
+              <a:rPr lang="en-US" sz="1200" i="1" dirty="0">
+                <a:solidFill>
+                  <a:srgbClr val="1A1A1A"/>
+                </a:solidFill>
+                <a:latin typeface="Georgia" pitchFamily="34" charset="0"/>
+                <a:ea typeface="Georgia" pitchFamily="34" charset="-122"/>
+                <a:cs typeface="Georgia" pitchFamily="34" charset="-120"/>
+              </a:rPr>
+              <a:t>Mid-Project Critique Circle</a:t>
+            </a:r>
+            <a:pPr algn="l" indent="0" marL="0">
+              <a:lnSpc>
+                <a:spcPts val="1680"/>
+              </a:lnSpc>
+              <a:spcBef>
+                <a:spcPts val="300"/>
+              </a:spcBef>
+              <a:spcAft>
+                <a:spcPts val="300"/>
+              </a:spcAft>
+              <a:buNone/>
+            </a:pPr>
+            <a:r>
+              <a:rPr lang="en-US" sz="1200" dirty="0">
+                <a:solidFill>
+                  <a:srgbClr val="1A1A1A"/>
+                </a:solidFill>
+                <a:latin typeface="Georgia" pitchFamily="34" charset="0"/>
+                <a:ea typeface="Georgia" pitchFamily="34" charset="-122"/>
+                <a:cs typeface="Georgia" pitchFamily="34" charset="-120"/>
+              </a:rPr>
+              <a:t> (see </a:t>
+            </a:r>
+            <a:pPr algn="l" indent="0" marL="0">
+              <a:lnSpc>
+                <a:spcPts val="1680"/>
+              </a:lnSpc>
+              <a:spcBef>
+                <a:spcPts val="300"/>
+              </a:spcBef>
+              <a:spcAft>
+                <a:spcPts val="300"/>
+              </a:spcAft>
+              <a:buNone/>
+            </a:pPr>
+            <a:r>
+              <a:rPr lang="en-US" sz="1200" dirty="0">
+                <a:solidFill>
+                  <a:srgbClr val="1A1A1A"/>
+                </a:solidFill>
+                <a:latin typeface="Georgia" pitchFamily="34" charset="0"/>
+                <a:ea typeface="Georgia" pitchFamily="34" charset="-122"/>
+                <a:cs typeface="Georgia" pitchFamily="34" charset="-120"/>
+              </a:rPr>
+              <a:t>activities/</a:t>
+            </a:r>
+            <a:pPr algn="l" indent="0" marL="0">
+              <a:lnSpc>
+                <a:spcPts val="1680"/>
+              </a:lnSpc>
+              <a:spcBef>
+                <a:spcPts val="300"/>
+              </a:spcBef>
+              <a:spcAft>
+                <a:spcPts val="300"/>
+              </a:spcAft>
+              <a:buNone/>
+            </a:pPr>
+            <a:r>
+              <a:rPr lang="en-US" sz="1200" dirty="0">
+                <a:solidFill>
+                  <a:srgbClr val="1A1A1A"/>
+                </a:solidFill>
+                <a:latin typeface="Georgia" pitchFamily="34" charset="0"/>
+                <a:ea typeface="Georgia" pitchFamily="34" charset="-122"/>
+                <a:cs typeface="Georgia" pitchFamily="34" charset="-120"/>
+              </a:rPr>
+              <a:t>). Today's slice: focus on the part of the activity that reinforces Capstone Overview and Project Menu.</a:t>
+            </a:r>
+            <a:endParaRPr lang="en-US" sz="1200" dirty="0"/>
+          </a:p>
+        </p:txBody>
+      </p:sp>
+      <p:sp>
+        <p:nvSpPr>
+          <p:cNvPr id="5" name="Text 3"/>
+          <p:cNvSpPr/>
+          <p:nvPr/>
+        </p:nvSpPr>
+        <p:spPr>
+          <a:xfrm>
+            <a:off x="406301" y="4434929"/>
+            <a:ext cx="8498026" cy="213271"/>
+          </a:xfrm>
+          <a:prstGeom prst="rect">
+            <a:avLst/>
+          </a:prstGeom>
+          <a:noFill/>
+          <a:ln/>
+        </p:spPr>
+        <p:txBody>
+          <a:bodyPr wrap="square" lIns="0" tIns="0" rIns="0" bIns="0" rtlCol="0" anchor="t"/>
+          <a:lstStyle/>
+          <a:p>
+            <a:pPr algn="l" indent="0" marL="0">
+              <a:lnSpc>
+                <a:spcPts val="1680"/>
+              </a:lnSpc>
+              <a:spcBef>
+                <a:spcPts val="300"/>
+              </a:spcBef>
+              <a:spcAft>
+                <a:spcPts val="300"/>
+              </a:spcAft>
+              <a:buNone/>
+            </a:pPr>
+            <a:r>
+              <a:rPr lang="en-US" sz="1200" dirty="0">
+                <a:solidFill>
+                  <a:srgbClr val="1A1A1A"/>
+                </a:solidFill>
+                <a:latin typeface="Georgia" pitchFamily="34" charset="0"/>
+                <a:ea typeface="Georgia" pitchFamily="34" charset="-122"/>
+                <a:cs typeface="Georgia" pitchFamily="34" charset="-120"/>
+              </a:rPr>
+              <a:t>Senior ·  · IKS Curriculum</a:t>
+            </a:r>
+            <a:endParaRPr lang="en-US" sz="1200" dirty="0"/>
+          </a:p>
+        </p:txBody>
+      </p:sp>
+    </p:spTree>
+  </p:cSld>
+  <p:clrMapOvr>
+    <a:masterClrMapping/>
+  </p:clrMapOvr>
+</p:sld>
+</file>
+
+<file path=ppt/slides/slide13.xml><?xml version="1.0" encoding="utf-8"?>
+<p:sld xmlns:a="http://schemas.openxmlformats.org/drawingml/2006/main" xmlns:r="http://schemas.openxmlformats.org/officeDocument/2006/relationships" xmlns:p="http://schemas.openxmlformats.org/presentationml/2006/main">
+  <p:cSld name="Slide 13">
+    <p:bg>
+      <p:bgPr>
+        <a:solidFill>
+          <a:srgbClr val="FAF7F2"/>
+        </a:solidFill>
+      </p:bgPr>
+    </p:bg>
+    <p:spTree>
+      <p:nvGrpSpPr>
+        <p:cNvPr id="1" name=""/>
+        <p:cNvGrpSpPr/>
+        <p:nvPr/>
+      </p:nvGrpSpPr>
+      <p:grpSpPr>
+        <a:xfrm>
+          <a:off x="0" y="0"/>
+          <a:ext cx="0" cy="0"/>
+          <a:chOff x="0" y="0"/>
+          <a:chExt cx="0" cy="0"/>
+        </a:xfrm>
+      </p:grpSpPr>
+      <p:sp>
+        <p:nvSpPr>
+          <p:cNvPr id="2" name="Text 0"/>
+          <p:cNvSpPr/>
+          <p:nvPr/>
+        </p:nvSpPr>
+        <p:spPr>
+          <a:xfrm>
+            <a:off x="0" y="0"/>
+            <a:ext cx="9144000" cy="101501"/>
+          </a:xfrm>
+          <a:prstGeom prst="rect">
+            <a:avLst/>
+          </a:prstGeom>
+          <a:solidFill>
+            <a:srgbClr val="5D1D2E"/>
+          </a:solidFill>
+          <a:ln/>
+        </p:spPr>
+        <p:txBody>
+          <a:bodyPr wrap="square" rtlCol="0" anchor="ctr"/>
+          <a:lstStyle/>
+          <a:p>
+            <a:pPr indent="0" marL="0">
+              <a:buNone/>
+            </a:pPr>
+            <a:endParaRPr lang="en-US" dirty="0"/>
+          </a:p>
+        </p:txBody>
+      </p:sp>
+      <p:sp>
+        <p:nvSpPr>
+          <p:cNvPr id="3" name="Text 1"/>
+          <p:cNvSpPr/>
+          <p:nvPr/>
+        </p:nvSpPr>
+        <p:spPr>
+          <a:xfrm>
+            <a:off x="406301" y="457051"/>
+            <a:ext cx="8498026" cy="274290"/>
+          </a:xfrm>
+          <a:prstGeom prst="rect">
+            <a:avLst/>
+          </a:prstGeom>
+          <a:noFill/>
+          <a:ln/>
+        </p:spPr>
+        <p:txBody>
+          <a:bodyPr wrap="square" lIns="0" tIns="0" rIns="0" bIns="0" rtlCol="0" anchor="t"/>
+          <a:lstStyle/>
+          <a:p>
+            <a:pPr algn="l" indent="0" marL="0">
+              <a:lnSpc>
+                <a:spcPts val="2160"/>
+              </a:lnSpc>
+              <a:spcBef>
+                <a:spcPts val="600"/>
+              </a:spcBef>
+              <a:spcAft>
+                <a:spcPts val="800"/>
+              </a:spcAft>
+              <a:buNone/>
+            </a:pPr>
+            <a:r>
+              <a:rPr lang="en-US" sz="1800" b="1" dirty="0">
+                <a:solidFill>
+                  <a:srgbClr val="997929"/>
+                </a:solidFill>
+                <a:latin typeface="Times New Roman" pitchFamily="34" charset="0"/>
+                <a:ea typeface="Times New Roman" pitchFamily="34" charset="-122"/>
+                <a:cs typeface="Times New Roman" pitchFamily="34" charset="-120"/>
+              </a:rPr>
+              <a:t>Wrap-up (5 min)</a:t>
+            </a:r>
+            <a:endParaRPr lang="en-US" sz="1800" dirty="0"/>
+          </a:p>
+        </p:txBody>
+      </p:sp>
+      <p:sp>
+        <p:nvSpPr>
+          <p:cNvPr id="4" name="Text 2"/>
+          <p:cNvSpPr/>
+          <p:nvPr/>
+        </p:nvSpPr>
+        <p:spPr>
+          <a:xfrm>
+            <a:off x="634901" y="883593"/>
+            <a:ext cx="8102798" cy="525661"/>
+          </a:xfrm>
+          <a:prstGeom prst="rect">
+            <a:avLst/>
+          </a:prstGeom>
+          <a:noFill/>
+          <a:ln/>
+        </p:spPr>
+        <p:txBody>
+          <a:bodyPr wrap="square" lIns="0" tIns="0" rIns="0" bIns="0" rtlCol="0" anchor="t"/>
+          <a:lstStyle/>
+          <a:p>
+            <a:pPr algn="l" marL="342900" indent="-342900">
+              <a:lnSpc>
+                <a:spcPts val="1620"/>
+              </a:lnSpc>
+              <a:spcAft>
+                <a:spcPts val="300"/>
+              </a:spcAft>
+              <a:buSzPct val="100000"/>
+              <a:buChar char="•"/>
+            </a:pPr>
+            <a:r>
+              <a:rPr lang="en-US" sz="1200" dirty="0">
+                <a:solidFill>
+                  <a:srgbClr val="1A1A1A"/>
+                </a:solidFill>
+                <a:latin typeface="Georgia" pitchFamily="34" charset="0"/>
+                <a:ea typeface="Georgia" pitchFamily="34" charset="-122"/>
+                <a:cs typeface="Georgia" pitchFamily="34" charset="-120"/>
+              </a:rPr>
+              <a:t>One-sentence exit ticket: </a:t>
+            </a:r>
+            <a:pPr algn="l" indent="0" marL="0">
+              <a:lnSpc>
+                <a:spcPts val="1620"/>
+              </a:lnSpc>
+              <a:spcAft>
+                <a:spcPts val="300"/>
+              </a:spcAft>
+              <a:buNone/>
+            </a:pPr>
+            <a:r>
+              <a:rPr lang="en-US" sz="1200" i="1" dirty="0">
+                <a:solidFill>
+                  <a:srgbClr val="1A1A1A"/>
+                </a:solidFill>
+                <a:latin typeface="Georgia" pitchFamily="34" charset="0"/>
+                <a:ea typeface="Georgia" pitchFamily="34" charset="-122"/>
+                <a:cs typeface="Georgia" pitchFamily="34" charset="-120"/>
+              </a:rPr>
+              <a:t>"What's one thing you learned today?"</a:t>
+            </a:r>
+            <a:endParaRPr lang="en-US" sz="1200" dirty="0"/>
+          </a:p>
+          <a:p>
+            <a:pPr algn="l" marL="342900" indent="-342900">
+              <a:lnSpc>
+                <a:spcPts val="1620"/>
+              </a:lnSpc>
+              <a:spcAft>
+                <a:spcPts val="300"/>
+              </a:spcAft>
+              <a:buSzPct val="100000"/>
+              <a:buChar char="•"/>
+            </a:pPr>
+            <a:r>
+              <a:rPr lang="en-US" sz="1200" dirty="0">
+                <a:solidFill>
+                  <a:srgbClr val="1A1A1A"/>
+                </a:solidFill>
+                <a:latin typeface="Georgia" pitchFamily="34" charset="0"/>
+                <a:ea typeface="Georgia" pitchFamily="34" charset="-122"/>
+                <a:cs typeface="Georgia" pitchFamily="34" charset="-120"/>
+              </a:rPr>
+              <a:t>Preview tomorrow.</a:t>
+            </a:r>
+            <a:endParaRPr lang="en-US" sz="1200" dirty="0"/>
+          </a:p>
+        </p:txBody>
+      </p:sp>
+      <p:sp>
+        <p:nvSpPr>
+          <p:cNvPr id="5" name="Text 3"/>
+          <p:cNvSpPr/>
+          <p:nvPr/>
+        </p:nvSpPr>
+        <p:spPr>
+          <a:xfrm>
+            <a:off x="406301" y="4434929"/>
+            <a:ext cx="8498026" cy="213271"/>
+          </a:xfrm>
+          <a:prstGeom prst="rect">
+            <a:avLst/>
+          </a:prstGeom>
+          <a:noFill/>
+          <a:ln/>
+        </p:spPr>
+        <p:txBody>
+          <a:bodyPr wrap="square" lIns="0" tIns="0" rIns="0" bIns="0" rtlCol="0" anchor="t"/>
+          <a:lstStyle/>
+          <a:p>
+            <a:pPr algn="l" indent="0" marL="0">
+              <a:lnSpc>
+                <a:spcPts val="1680"/>
+              </a:lnSpc>
+              <a:spcBef>
+                <a:spcPts val="300"/>
+              </a:spcBef>
+              <a:spcAft>
+                <a:spcPts val="300"/>
+              </a:spcAft>
+              <a:buNone/>
+            </a:pPr>
+            <a:r>
+              <a:rPr lang="en-US" sz="1200" dirty="0">
+                <a:solidFill>
+                  <a:srgbClr val="1A1A1A"/>
+                </a:solidFill>
+                <a:latin typeface="Georgia" pitchFamily="34" charset="0"/>
+                <a:ea typeface="Georgia" pitchFamily="34" charset="-122"/>
+                <a:cs typeface="Georgia" pitchFamily="34" charset="-120"/>
+              </a:rPr>
+              <a:t>Senior ·  · IKS Curriculum</a:t>
+            </a:r>
+            <a:endParaRPr lang="en-US" sz="1200" dirty="0"/>
+          </a:p>
+        </p:txBody>
+      </p:sp>
+    </p:spTree>
+  </p:cSld>
+  <p:clrMapOvr>
+    <a:masterClrMapping/>
+  </p:clrMapOvr>
+</p:sld>
+</file>
+
+<file path=ppt/slides/slide14.xml><?xml version="1.0" encoding="utf-8"?>
+<p:sld xmlns:a="http://schemas.openxmlformats.org/drawingml/2006/main" xmlns:r="http://schemas.openxmlformats.org/officeDocument/2006/relationships" xmlns:p="http://schemas.openxmlformats.org/presentationml/2006/main">
+  <p:cSld name="Slide 14">
+    <p:bg>
+      <p:bgPr>
+        <a:solidFill>
+          <a:srgbClr val="FAF7F2"/>
+        </a:solidFill>
+      </p:bgPr>
+    </p:bg>
+    <p:spTree>
+      <p:nvGrpSpPr>
+        <p:cNvPr id="1" name=""/>
+        <p:cNvGrpSpPr/>
+        <p:nvPr/>
+      </p:nvGrpSpPr>
+      <p:grpSpPr>
+        <a:xfrm>
+          <a:off x="0" y="0"/>
+          <a:ext cx="0" cy="0"/>
+          <a:chOff x="0" y="0"/>
+          <a:chExt cx="0" cy="0"/>
+        </a:xfrm>
+      </p:grpSpPr>
+      <p:sp>
+        <p:nvSpPr>
+          <p:cNvPr id="2" name="Text 0"/>
+          <p:cNvSpPr/>
+          <p:nvPr/>
+        </p:nvSpPr>
+        <p:spPr>
+          <a:xfrm>
+            <a:off x="0" y="0"/>
+            <a:ext cx="9144000" cy="101501"/>
+          </a:xfrm>
+          <a:prstGeom prst="rect">
+            <a:avLst/>
+          </a:prstGeom>
+          <a:solidFill>
+            <a:srgbClr val="5D1D2E"/>
+          </a:solidFill>
+          <a:ln/>
+        </p:spPr>
+        <p:txBody>
+          <a:bodyPr wrap="square" rtlCol="0" anchor="ctr"/>
+          <a:lstStyle/>
+          <a:p>
+            <a:pPr indent="0" marL="0">
+              <a:buNone/>
+            </a:pPr>
+            <a:endParaRPr lang="en-US" dirty="0"/>
+          </a:p>
+        </p:txBody>
+      </p:sp>
+      <p:sp>
+        <p:nvSpPr>
+          <p:cNvPr id="3" name="Text 1"/>
+          <p:cNvSpPr/>
+          <p:nvPr/>
+        </p:nvSpPr>
+        <p:spPr>
+          <a:xfrm>
+            <a:off x="406301" y="457051"/>
+            <a:ext cx="8498026" cy="274290"/>
+          </a:xfrm>
+          <a:prstGeom prst="rect">
+            <a:avLst/>
+          </a:prstGeom>
+          <a:noFill/>
+          <a:ln/>
+        </p:spPr>
+        <p:txBody>
+          <a:bodyPr wrap="square" lIns="0" tIns="0" rIns="0" bIns="0" rtlCol="0" anchor="t"/>
+          <a:lstStyle/>
+          <a:p>
+            <a:pPr algn="l" indent="0" marL="0">
+              <a:lnSpc>
+                <a:spcPts val="2160"/>
+              </a:lnSpc>
+              <a:spcBef>
+                <a:spcPts val="600"/>
+              </a:spcBef>
+              <a:spcAft>
+                <a:spcPts val="800"/>
+              </a:spcAft>
+              <a:buNone/>
+            </a:pPr>
+            <a:r>
+              <a:rPr lang="en-US" sz="1800" b="1" dirty="0">
+                <a:solidFill>
+                  <a:srgbClr val="997929"/>
+                </a:solidFill>
+                <a:latin typeface="Times New Roman" pitchFamily="34" charset="0"/>
+                <a:ea typeface="Times New Roman" pitchFamily="34" charset="-122"/>
+                <a:cs typeface="Times New Roman" pitchFamily="34" charset="-120"/>
+              </a:rPr>
+              <a:t>Homework</a:t>
+            </a:r>
+            <a:endParaRPr lang="en-US" sz="1800" dirty="0"/>
+          </a:p>
+        </p:txBody>
+      </p:sp>
+      <p:sp>
+        <p:nvSpPr>
+          <p:cNvPr id="4" name="Text 2"/>
+          <p:cNvSpPr/>
+          <p:nvPr/>
+        </p:nvSpPr>
+        <p:spPr>
+          <a:xfrm>
+            <a:off x="406301" y="870942"/>
+            <a:ext cx="8498026" cy="222796"/>
+          </a:xfrm>
+          <a:prstGeom prst="rect">
+            <a:avLst/>
+          </a:prstGeom>
+          <a:noFill/>
+          <a:ln/>
+        </p:spPr>
+        <p:txBody>
+          <a:bodyPr wrap="square" lIns="0" tIns="0" rIns="0" bIns="0" rtlCol="0" anchor="t"/>
+          <a:lstStyle/>
+          <a:p>
+            <a:pPr algn="l" indent="0" marL="0">
+              <a:lnSpc>
+                <a:spcPts val="1680"/>
+              </a:lnSpc>
+              <a:spcBef>
+                <a:spcPts val="300"/>
+              </a:spcBef>
+              <a:spcAft>
+                <a:spcPts val="300"/>
+              </a:spcAft>
+              <a:buNone/>
+            </a:pPr>
+            <a:r>
+              <a:rPr lang="en-US" sz="1200" dirty="0">
+                <a:solidFill>
+                  <a:srgbClr val="1A1A1A"/>
+                </a:solidFill>
+                <a:latin typeface="Georgia" pitchFamily="34" charset="0"/>
+                <a:ea typeface="Georgia" pitchFamily="34" charset="-122"/>
+                <a:cs typeface="Georgia" pitchFamily="34" charset="-120"/>
+              </a:rPr>
+              <a:t>(See </a:t>
+            </a:r>
+            <a:pPr algn="l" indent="0" marL="0">
+              <a:lnSpc>
+                <a:spcPts val="1680"/>
+              </a:lnSpc>
+              <a:spcBef>
+                <a:spcPts val="300"/>
+              </a:spcBef>
+              <a:spcAft>
+                <a:spcPts val="300"/>
+              </a:spcAft>
+              <a:buNone/>
+            </a:pPr>
+            <a:r>
+              <a:rPr lang="en-US" sz="1200" dirty="0">
+                <a:solidFill>
+                  <a:srgbClr val="1A1A1A"/>
+                </a:solidFill>
+                <a:latin typeface="Georgia" pitchFamily="34" charset="0"/>
+                <a:ea typeface="Georgia" pitchFamily="34" charset="-122"/>
+                <a:cs typeface="Georgia" pitchFamily="34" charset="-120"/>
+              </a:rPr>
+              <a:t>homework.md</a:t>
+            </a:r>
+            <a:pPr algn="l" indent="0" marL="0">
+              <a:lnSpc>
+                <a:spcPts val="1680"/>
+              </a:lnSpc>
+              <a:spcBef>
+                <a:spcPts val="300"/>
+              </a:spcBef>
+              <a:spcAft>
+                <a:spcPts val="300"/>
+              </a:spcAft>
+              <a:buNone/>
+            </a:pPr>
+            <a:r>
+              <a:rPr lang="en-US" sz="1200" dirty="0">
+                <a:solidFill>
+                  <a:srgbClr val="1A1A1A"/>
+                </a:solidFill>
+                <a:latin typeface="Georgia" pitchFamily="34" charset="0"/>
+                <a:ea typeface="Georgia" pitchFamily="34" charset="-122"/>
+                <a:cs typeface="Georgia" pitchFamily="34" charset="-120"/>
+              </a:rPr>
+              <a:t> for today's task.)</a:t>
+            </a:r>
+            <a:endParaRPr lang="en-US" sz="1200" dirty="0"/>
+          </a:p>
+        </p:txBody>
+      </p:sp>
+      <p:sp>
+        <p:nvSpPr>
+          <p:cNvPr id="5" name="Text 3"/>
+          <p:cNvSpPr/>
+          <p:nvPr/>
+        </p:nvSpPr>
+        <p:spPr>
+          <a:xfrm>
+            <a:off x="406301" y="4434929"/>
+            <a:ext cx="8498026" cy="213271"/>
+          </a:xfrm>
+          <a:prstGeom prst="rect">
+            <a:avLst/>
+          </a:prstGeom>
+          <a:noFill/>
+          <a:ln/>
+        </p:spPr>
+        <p:txBody>
+          <a:bodyPr wrap="square" lIns="0" tIns="0" rIns="0" bIns="0" rtlCol="0" anchor="t"/>
+          <a:lstStyle/>
+          <a:p>
+            <a:pPr algn="l" indent="0" marL="0">
+              <a:lnSpc>
+                <a:spcPts val="1680"/>
+              </a:lnSpc>
+              <a:spcBef>
+                <a:spcPts val="300"/>
+              </a:spcBef>
+              <a:spcAft>
+                <a:spcPts val="300"/>
+              </a:spcAft>
+              <a:buNone/>
+            </a:pPr>
+            <a:r>
+              <a:rPr lang="en-US" sz="1200" dirty="0">
+                <a:solidFill>
+                  <a:srgbClr val="1A1A1A"/>
+                </a:solidFill>
+                <a:latin typeface="Georgia" pitchFamily="34" charset="0"/>
+                <a:ea typeface="Georgia" pitchFamily="34" charset="-122"/>
+                <a:cs typeface="Georgia" pitchFamily="34" charset="-120"/>
+              </a:rPr>
+              <a:t>Senior ·  · IKS Curriculum</a:t>
+            </a:r>
+            <a:endParaRPr lang="en-US" sz="1200" dirty="0"/>
+          </a:p>
+        </p:txBody>
+      </p:sp>
+    </p:spTree>
+  </p:cSld>
+  <p:clrMapOvr>
+    <a:masterClrMapping/>
+  </p:clrMapOvr>
+</p:sld>
+</file>
+
+<file path=ppt/slides/slide15.xml><?xml version="1.0" encoding="utf-8"?>
+<p:sld xmlns:a="http://schemas.openxmlformats.org/drawingml/2006/main" xmlns:r="http://schemas.openxmlformats.org/officeDocument/2006/relationships" xmlns:p="http://schemas.openxmlformats.org/presentationml/2006/main">
+  <p:cSld name="Slide 15">
+    <p:bg>
+      <p:bgPr>
+        <a:solidFill>
+          <a:srgbClr val="FAF7F2"/>
+        </a:solidFill>
+      </p:bgPr>
+    </p:bg>
+    <p:spTree>
+      <p:nvGrpSpPr>
+        <p:cNvPr id="1" name=""/>
+        <p:cNvGrpSpPr/>
+        <p:nvPr/>
+      </p:nvGrpSpPr>
+      <p:grpSpPr>
+        <a:xfrm>
+          <a:off x="0" y="0"/>
+          <a:ext cx="0" cy="0"/>
+          <a:chOff x="0" y="0"/>
+          <a:chExt cx="0" cy="0"/>
+        </a:xfrm>
+      </p:grpSpPr>
+      <p:sp>
+        <p:nvSpPr>
+          <p:cNvPr id="2" name="Text 0"/>
+          <p:cNvSpPr/>
+          <p:nvPr/>
+        </p:nvSpPr>
+        <p:spPr>
+          <a:xfrm>
+            <a:off x="0" y="0"/>
+            <a:ext cx="9144000" cy="101501"/>
+          </a:xfrm>
+          <a:prstGeom prst="rect">
+            <a:avLst/>
+          </a:prstGeom>
+          <a:solidFill>
+            <a:srgbClr val="5D1D2E"/>
+          </a:solidFill>
+          <a:ln/>
+        </p:spPr>
+        <p:txBody>
+          <a:bodyPr wrap="square" rtlCol="0" anchor="ctr"/>
+          <a:lstStyle/>
+          <a:p>
+            <a:pPr indent="0" marL="0">
+              <a:buNone/>
+            </a:pPr>
+            <a:endParaRPr lang="en-US" dirty="0"/>
+          </a:p>
+        </p:txBody>
+      </p:sp>
+      <p:sp>
+        <p:nvSpPr>
+          <p:cNvPr id="3" name="Text 1"/>
+          <p:cNvSpPr/>
+          <p:nvPr/>
+        </p:nvSpPr>
+        <p:spPr>
+          <a:xfrm>
+            <a:off x="406301" y="457051"/>
+            <a:ext cx="8498026" cy="274290"/>
+          </a:xfrm>
+          <a:prstGeom prst="rect">
+            <a:avLst/>
+          </a:prstGeom>
+          <a:noFill/>
+          <a:ln/>
+        </p:spPr>
+        <p:txBody>
+          <a:bodyPr wrap="square" lIns="0" tIns="0" rIns="0" bIns="0" rtlCol="0" anchor="t"/>
+          <a:lstStyle/>
+          <a:p>
+            <a:pPr algn="l" indent="0" marL="0">
+              <a:lnSpc>
+                <a:spcPts val="2160"/>
+              </a:lnSpc>
+              <a:spcBef>
+                <a:spcPts val="600"/>
+              </a:spcBef>
+              <a:spcAft>
+                <a:spcPts val="800"/>
+              </a:spcAft>
+              <a:buNone/>
+            </a:pPr>
+            <a:r>
+              <a:rPr lang="en-US" sz="1800" b="1" dirty="0">
+                <a:solidFill>
+                  <a:srgbClr val="997929"/>
+                </a:solidFill>
+                <a:latin typeface="Times New Roman" pitchFamily="34" charset="0"/>
+                <a:ea typeface="Times New Roman" pitchFamily="34" charset="-122"/>
+                <a:cs typeface="Times New Roman" pitchFamily="34" charset="-120"/>
+              </a:rPr>
+              <a:t>Differentiation</a:t>
+            </a:r>
+            <a:endParaRPr lang="en-US" sz="1800" dirty="0"/>
+          </a:p>
+        </p:txBody>
+      </p:sp>
+      <p:sp>
+        <p:nvSpPr>
+          <p:cNvPr id="4" name="Text 2"/>
+          <p:cNvSpPr/>
+          <p:nvPr/>
+        </p:nvSpPr>
+        <p:spPr>
+          <a:xfrm>
+            <a:off x="634901" y="883593"/>
+            <a:ext cx="8102798" cy="525661"/>
+          </a:xfrm>
+          <a:prstGeom prst="rect">
+            <a:avLst/>
+          </a:prstGeom>
+          <a:noFill/>
+          <a:ln/>
+        </p:spPr>
+        <p:txBody>
+          <a:bodyPr wrap="square" lIns="0" tIns="0" rIns="0" bIns="0" rtlCol="0" anchor="t"/>
+          <a:lstStyle/>
+          <a:p>
+            <a:pPr algn="l" marL="342900" indent="-342900">
+              <a:lnSpc>
+                <a:spcPts val="1620"/>
+              </a:lnSpc>
+              <a:spcAft>
+                <a:spcPts val="300"/>
+              </a:spcAft>
+              <a:buSzPct val="100000"/>
+              <a:buChar char="•"/>
+            </a:pPr>
+            <a:r>
+              <a:rPr lang="en-US" sz="1200" b="1" dirty="0">
+                <a:solidFill>
+                  <a:srgbClr val="1A1A1A"/>
+                </a:solidFill>
+                <a:latin typeface="Georgia" pitchFamily="34" charset="0"/>
+                <a:ea typeface="Georgia" pitchFamily="34" charset="-122"/>
+                <a:cs typeface="Georgia" pitchFamily="34" charset="-120"/>
+              </a:rPr>
+              <a:t>Extension:</a:t>
+            </a:r>
+            <a:pPr algn="l" indent="0" marL="0">
+              <a:lnSpc>
+                <a:spcPts val="1620"/>
+              </a:lnSpc>
+              <a:spcAft>
+                <a:spcPts val="300"/>
+              </a:spcAft>
+              <a:buNone/>
+            </a:pPr>
+            <a:r>
+              <a:rPr lang="en-US" sz="1200" dirty="0">
+                <a:solidFill>
+                  <a:srgbClr val="1A1A1A"/>
+                </a:solidFill>
+                <a:latin typeface="Georgia" pitchFamily="34" charset="0"/>
+                <a:ea typeface="Georgia" pitchFamily="34" charset="-122"/>
+                <a:cs typeface="Georgia" pitchFamily="34" charset="-120"/>
+              </a:rPr>
+              <a:t> offer one open question or extra problem for fast finishers.</a:t>
+            </a:r>
+            <a:endParaRPr lang="en-US" sz="1200" dirty="0"/>
+          </a:p>
+          <a:p>
+            <a:pPr algn="l" marL="342900" indent="-342900">
+              <a:lnSpc>
+                <a:spcPts val="1620"/>
+              </a:lnSpc>
+              <a:spcAft>
+                <a:spcPts val="300"/>
+              </a:spcAft>
+              <a:buSzPct val="100000"/>
+              <a:buChar char="•"/>
+            </a:pPr>
+            <a:r>
+              <a:rPr lang="en-US" sz="1200" b="1" dirty="0">
+                <a:solidFill>
+                  <a:srgbClr val="1A1A1A"/>
+                </a:solidFill>
+                <a:latin typeface="Georgia" pitchFamily="34" charset="0"/>
+                <a:ea typeface="Georgia" pitchFamily="34" charset="-122"/>
+                <a:cs typeface="Georgia" pitchFamily="34" charset="-120"/>
+              </a:rPr>
+              <a:t>Support:</a:t>
+            </a:r>
+            <a:pPr algn="l" indent="0" marL="0">
+              <a:lnSpc>
+                <a:spcPts val="1620"/>
+              </a:lnSpc>
+              <a:spcAft>
+                <a:spcPts val="300"/>
+              </a:spcAft>
+              <a:buNone/>
+            </a:pPr>
+            <a:r>
+              <a:rPr lang="en-US" sz="1200" dirty="0">
+                <a:solidFill>
+                  <a:srgbClr val="1A1A1A"/>
+                </a:solidFill>
+                <a:latin typeface="Georgia" pitchFamily="34" charset="0"/>
+                <a:ea typeface="Georgia" pitchFamily="34" charset="-122"/>
+                <a:cs typeface="Georgia" pitchFamily="34" charset="-120"/>
+              </a:rPr>
+              <a:t> pair students who need scaffolds; offer partial outlines.</a:t>
+            </a:r>
+            <a:endParaRPr lang="en-US" sz="1200" dirty="0"/>
+          </a:p>
+        </p:txBody>
+      </p:sp>
+      <p:sp>
+        <p:nvSpPr>
+          <p:cNvPr id="5" name="Text 3"/>
+          <p:cNvSpPr/>
+          <p:nvPr/>
+        </p:nvSpPr>
+        <p:spPr>
+          <a:xfrm>
+            <a:off x="406301" y="4434929"/>
+            <a:ext cx="8498026" cy="213271"/>
+          </a:xfrm>
+          <a:prstGeom prst="rect">
+            <a:avLst/>
+          </a:prstGeom>
+          <a:noFill/>
+          <a:ln/>
+        </p:spPr>
+        <p:txBody>
+          <a:bodyPr wrap="square" lIns="0" tIns="0" rIns="0" bIns="0" rtlCol="0" anchor="t"/>
+          <a:lstStyle/>
+          <a:p>
+            <a:pPr algn="l" indent="0" marL="0">
+              <a:lnSpc>
+                <a:spcPts val="1680"/>
+              </a:lnSpc>
+              <a:spcBef>
+                <a:spcPts val="300"/>
+              </a:spcBef>
+              <a:spcAft>
+                <a:spcPts val="300"/>
+              </a:spcAft>
+              <a:buNone/>
+            </a:pPr>
+            <a:r>
+              <a:rPr lang="en-US" sz="1200" dirty="0">
+                <a:solidFill>
+                  <a:srgbClr val="1A1A1A"/>
+                </a:solidFill>
+                <a:latin typeface="Georgia" pitchFamily="34" charset="0"/>
+                <a:ea typeface="Georgia" pitchFamily="34" charset="-122"/>
+                <a:cs typeface="Georgia" pitchFamily="34" charset="-120"/>
+              </a:rPr>
+              <a:t>Senior ·  · IKS Curriculum</a:t>
+            </a:r>
+            <a:endParaRPr lang="en-US" sz="1200" dirty="0"/>
+          </a:p>
+        </p:txBody>
+      </p:sp>
+    </p:spTree>
+  </p:cSld>
+  <p:clrMapOvr>
+    <a:masterClrMapping/>
+  </p:clrMapOvr>
+</p:sld>
+</file>
+
+<file path=ppt/slides/slide16.xml><?xml version="1.0" encoding="utf-8"?>
+<p:sld xmlns:a="http://schemas.openxmlformats.org/drawingml/2006/main" xmlns:r="http://schemas.openxmlformats.org/officeDocument/2006/relationships" xmlns:p="http://schemas.openxmlformats.org/presentationml/2006/main">
+  <p:cSld name="Slide 16">
+    <p:bg>
+      <p:bgPr>
+        <a:solidFill>
+          <a:srgbClr val="FAF7F2"/>
+        </a:solidFill>
+      </p:bgPr>
+    </p:bg>
+    <p:spTree>
+      <p:nvGrpSpPr>
+        <p:cNvPr id="1" name=""/>
+        <p:cNvGrpSpPr/>
+        <p:nvPr/>
+      </p:nvGrpSpPr>
+      <p:grpSpPr>
+        <a:xfrm>
+          <a:off x="0" y="0"/>
+          <a:ext cx="0" cy="0"/>
+          <a:chOff x="0" y="0"/>
+          <a:chExt cx="0" cy="0"/>
+        </a:xfrm>
+      </p:grpSpPr>
+      <p:sp>
+        <p:nvSpPr>
+          <p:cNvPr id="2" name="Text 0"/>
+          <p:cNvSpPr/>
+          <p:nvPr/>
+        </p:nvSpPr>
+        <p:spPr>
+          <a:xfrm>
+            <a:off x="0" y="0"/>
+            <a:ext cx="9144000" cy="101501"/>
+          </a:xfrm>
+          <a:prstGeom prst="rect">
+            <a:avLst/>
+          </a:prstGeom>
+          <a:solidFill>
+            <a:srgbClr val="5D1D2E"/>
+          </a:solidFill>
+          <a:ln/>
+        </p:spPr>
+        <p:txBody>
+          <a:bodyPr wrap="square" rtlCol="0" anchor="ctr"/>
+          <a:lstStyle/>
+          <a:p>
+            <a:pPr indent="0" marL="0">
+              <a:buNone/>
+            </a:pPr>
+            <a:endParaRPr lang="en-US" dirty="0"/>
+          </a:p>
+        </p:txBody>
+      </p:sp>
+      <p:sp>
+        <p:nvSpPr>
+          <p:cNvPr id="3" name="Text 1"/>
+          <p:cNvSpPr/>
+          <p:nvPr/>
+        </p:nvSpPr>
+        <p:spPr>
+          <a:xfrm>
+            <a:off x="406301" y="457051"/>
+            <a:ext cx="8498026" cy="274290"/>
+          </a:xfrm>
+          <a:prstGeom prst="rect">
+            <a:avLst/>
+          </a:prstGeom>
+          <a:noFill/>
+          <a:ln/>
+        </p:spPr>
+        <p:txBody>
+          <a:bodyPr wrap="square" lIns="0" tIns="0" rIns="0" bIns="0" rtlCol="0" anchor="t"/>
+          <a:lstStyle/>
+          <a:p>
+            <a:pPr algn="l" indent="0" marL="0">
+              <a:lnSpc>
+                <a:spcPts val="2160"/>
+              </a:lnSpc>
+              <a:spcBef>
+                <a:spcPts val="600"/>
+              </a:spcBef>
+              <a:spcAft>
+                <a:spcPts val="800"/>
+              </a:spcAft>
+              <a:buNone/>
+            </a:pPr>
+            <a:r>
+              <a:rPr lang="en-US" sz="1800" b="1" dirty="0">
+                <a:solidFill>
+                  <a:srgbClr val="997929"/>
+                </a:solidFill>
+                <a:latin typeface="Times New Roman" pitchFamily="34" charset="0"/>
+                <a:ea typeface="Times New Roman" pitchFamily="34" charset="-122"/>
+                <a:cs typeface="Times New Roman" pitchFamily="34" charset="-120"/>
+              </a:rPr>
+              <a:t>Teacher notes</a:t>
+            </a:r>
+            <a:endParaRPr lang="en-US" sz="1800" dirty="0"/>
+          </a:p>
+        </p:txBody>
+      </p:sp>
+      <p:sp>
+        <p:nvSpPr>
+          <p:cNvPr id="4" name="Text 2"/>
+          <p:cNvSpPr/>
+          <p:nvPr/>
+        </p:nvSpPr>
+        <p:spPr>
+          <a:xfrm>
+            <a:off x="634901" y="883593"/>
+            <a:ext cx="8102798" cy="731341"/>
+          </a:xfrm>
+          <a:prstGeom prst="rect">
+            <a:avLst/>
+          </a:prstGeom>
+          <a:noFill/>
+          <a:ln/>
+        </p:spPr>
+        <p:txBody>
+          <a:bodyPr wrap="square" lIns="0" tIns="0" rIns="0" bIns="0" rtlCol="0" anchor="t"/>
+          <a:lstStyle/>
+          <a:p>
+            <a:pPr algn="l" marL="342900" indent="-342900">
+              <a:lnSpc>
+                <a:spcPts val="1620"/>
+              </a:lnSpc>
+              <a:spcAft>
+                <a:spcPts val="300"/>
+              </a:spcAft>
+              <a:buSzPct val="100000"/>
+              <a:buChar char="•"/>
+            </a:pPr>
+            <a:r>
+              <a:rPr lang="en-US" sz="1200" dirty="0">
+                <a:solidFill>
+                  <a:srgbClr val="1A1A1A"/>
+                </a:solidFill>
+                <a:latin typeface="Georgia" pitchFamily="34" charset="0"/>
+                <a:ea typeface="Georgia" pitchFamily="34" charset="-122"/>
+                <a:cs typeface="Georgia" pitchFamily="34" charset="-120"/>
+              </a:rPr>
+              <a:t>Citations: at least one quoted verse with citation per module. Day 1 already includes one if applicable; you may add more.</a:t>
+            </a:r>
+            <a:endParaRPr lang="en-US" sz="1200" dirty="0"/>
+          </a:p>
+          <a:p>
+            <a:pPr algn="l" marL="342900" indent="-342900">
+              <a:lnSpc>
+                <a:spcPts val="1620"/>
+              </a:lnSpc>
+              <a:spcAft>
+                <a:spcPts val="300"/>
+              </a:spcAft>
+              <a:buSzPct val="100000"/>
+              <a:buChar char="•"/>
+            </a:pPr>
+            <a:r>
+              <a:rPr lang="en-US" sz="1200" dirty="0">
+                <a:solidFill>
+                  <a:srgbClr val="1A1A1A"/>
+                </a:solidFill>
+                <a:latin typeface="Georgia" pitchFamily="34" charset="0"/>
+                <a:ea typeface="Georgia" pitchFamily="34" charset="-122"/>
+                <a:cs typeface="Georgia" pitchFamily="34" charset="-120"/>
+              </a:rPr>
+              <a:t>Connect to prior modules where natural (especially Module 2 pañcabhūta).</a:t>
             </a:r>
             <a:endParaRPr lang="en-US" sz="1200" dirty="0"/>
           </a:p>
@@ -3066,7 +4478,7 @@
                 <a:ea typeface="Times New Roman" pitchFamily="34" charset="-122"/>
                 <a:cs typeface="Times New Roman" pitchFamily="34" charset="-120"/>
               </a:rPr>
-              <a:t>Materials</a:t>
+              <a:t>Learning objective</a:t>
             </a:r>
             <a:endParaRPr lang="en-US" sz="1800" dirty="0"/>
           </a:p>
@@ -3114,7 +4526,7 @@
                 <a:ea typeface="Georgia" pitchFamily="34" charset="-122"/>
                 <a:cs typeface="Georgia" pitchFamily="34" charset="-120"/>
               </a:rPr>
-              <a:t>– Whiteboard / chart paper – Notebook, pen per student</a:t>
+              <a:t>By the end of this lesson, students will: review the 10-option project menu; pick a project.</a:t>
             </a:r>
             <a:endParaRPr lang="en-US" sz="1200" dirty="0"/>
           </a:p>
@@ -3123,52 +4535,6 @@
       <p:sp>
         <p:nvSpPr>
           <p:cNvPr id="5" name="Text 3"/>
-          <p:cNvSpPr/>
-          <p:nvPr/>
-        </p:nvSpPr>
-        <p:spPr>
-          <a:xfrm>
-            <a:off x="634901" y="1173063"/>
-            <a:ext cx="8102798" cy="281880"/>
-          </a:xfrm>
-          <a:prstGeom prst="rect">
-            <a:avLst/>
-          </a:prstGeom>
-          <a:noFill/>
-          <a:ln/>
-        </p:spPr>
-        <p:txBody>
-          <a:bodyPr wrap="square" lIns="0" tIns="0" rIns="0" bIns="0" rtlCol="0" anchor="t"/>
-          <a:lstStyle/>
-          <a:p>
-            <a:pPr algn="l" marL="342900" indent="-342900">
-              <a:lnSpc>
-                <a:spcPts val="1620"/>
-              </a:lnSpc>
-              <a:spcAft>
-                <a:spcPts val="300"/>
-              </a:spcAft>
-              <a:buSzPct val="100000"/>
-              <a:buChar char="•"/>
-            </a:pPr>
-            <a:r>
-              <a:rPr lang="en-US" sz="1200" dirty="0">
-                <a:solidFill>
-                  <a:srgbClr val="1A1A1A"/>
-                </a:solidFill>
-                <a:latin typeface="Georgia" pitchFamily="34" charset="0"/>
-                <a:ea typeface="Georgia" pitchFamily="34" charset="-122"/>
-                <a:cs typeface="Georgia" pitchFamily="34" charset="-120"/>
-              </a:rPr>
-              <a:t>(See lesson-plan.md for any day-specific materials)</a:t>
-            </a:r>
-            <a:endParaRPr lang="en-US" sz="1200" dirty="0"/>
-          </a:p>
-        </p:txBody>
-      </p:sp>
-      <p:sp>
-        <p:nvSpPr>
-          <p:cNvPr id="6" name="Text 4"/>
           <p:cNvSpPr/>
           <p:nvPr/>
         </p:nvSpPr>
@@ -3318,7 +4684,7 @@
                 <a:ea typeface="Times New Roman" pitchFamily="34" charset="-122"/>
                 <a:cs typeface="Times New Roman" pitchFamily="34" charset="-120"/>
               </a:rPr>
-              <a:t>Vocabulary introduced today</a:t>
+              <a:t>Materials</a:t>
             </a:r>
             <a:endParaRPr lang="en-US" sz="1800" dirty="0"/>
           </a:p>
@@ -3333,7 +4699,7 @@
         <p:spPr>
           <a:xfrm>
             <a:off x="634901" y="883593"/>
-            <a:ext cx="8102798" cy="281880"/>
+            <a:ext cx="8102798" cy="769441"/>
           </a:xfrm>
           <a:prstGeom prst="rect">
             <a:avLst/>
@@ -3356,24 +4722,28 @@
               <a:buChar char="•"/>
             </a:pPr>
             <a:r>
-              <a:rPr lang="en-US" sz="1200" i="1" dirty="0">
-                <a:solidFill>
-                  <a:srgbClr val="1A1A1A"/>
-                </a:solidFill>
-                <a:latin typeface="Georgia" pitchFamily="34" charset="0"/>
-                <a:ea typeface="Georgia" pitchFamily="34" charset="-122"/>
-                <a:cs typeface="Georgia" pitchFamily="34" charset="-120"/>
-              </a:rPr>
-              <a:t>anvayana</a:t>
-            </a:r>
-            <a:pPr algn="l" indent="0" marL="0">
+              <a:rPr lang="en-US" sz="1200" dirty="0">
+                <a:solidFill>
+                  <a:srgbClr val="1A1A1A"/>
+                </a:solidFill>
+                <a:latin typeface="Georgia" pitchFamily="34" charset="0"/>
+                <a:ea typeface="Georgia" pitchFamily="34" charset="-122"/>
+                <a:cs typeface="Georgia" pitchFamily="34" charset="-120"/>
+              </a:rPr>
+              <a:t>Whiteboard / chart paper</a:t>
+            </a:r>
+            <a:endParaRPr lang="en-US" sz="1200" dirty="0"/>
+          </a:p>
+          <a:p>
+            <a:pPr algn="l" marL="342900" indent="-342900">
               <a:lnSpc>
                 <a:spcPts val="1620"/>
               </a:lnSpc>
               <a:spcAft>
                 <a:spcPts val="300"/>
               </a:spcAft>
-              <a:buNone/>
+              <a:buSzPct val="100000"/>
+              <a:buChar char="•"/>
             </a:pPr>
             <a:r>
               <a:rPr lang="en-US" sz="1200" dirty="0">
@@ -3384,7 +4754,31 @@
                 <a:ea typeface="Georgia" pitchFamily="34" charset="-122"/>
                 <a:cs typeface="Georgia" pitchFamily="34" charset="-120"/>
               </a:rPr>
-              <a:t> (IAST: anvayana; lit. "integration / following-through; capstone synthesis")</a:t>
+              <a:t>Notebook, pen per student</a:t>
+            </a:r>
+            <a:endParaRPr lang="en-US" sz="1200" dirty="0"/>
+          </a:p>
+          <a:p>
+            <a:pPr algn="l" marL="342900" indent="-342900">
+              <a:lnSpc>
+                <a:spcPts val="1620"/>
+              </a:lnSpc>
+              <a:spcAft>
+                <a:spcPts val="300"/>
+              </a:spcAft>
+              <a:buSzPct val="100000"/>
+              <a:buChar char="•"/>
+            </a:pPr>
+            <a:r>
+              <a:rPr lang="en-US" sz="1200" dirty="0">
+                <a:solidFill>
+                  <a:srgbClr val="1A1A1A"/>
+                </a:solidFill>
+                <a:latin typeface="Georgia" pitchFamily="34" charset="0"/>
+                <a:ea typeface="Georgia" pitchFamily="34" charset="-122"/>
+                <a:cs typeface="Georgia" pitchFamily="34" charset="-120"/>
+              </a:rPr>
+              <a:t>(See lesson-plan.md for any day-specific materials)</a:t>
             </a:r>
             <a:endParaRPr lang="en-US" sz="1200" dirty="0"/>
           </a:p>
@@ -3542,7 +4936,7 @@
                 <a:ea typeface="Times New Roman" pitchFamily="34" charset="-122"/>
                 <a:cs typeface="Times New Roman" pitchFamily="34" charset="-120"/>
               </a:rPr>
-              <a:t>Primary source (today's reading)</a:t>
+              <a:t>Vocabulary introduced today</a:t>
             </a:r>
             <a:endParaRPr lang="en-US" sz="1800" dirty="0"/>
           </a:p>
@@ -3556,8 +4950,8 @@
         </p:nvSpPr>
         <p:spPr>
           <a:xfrm>
-            <a:off x="406301" y="870942"/>
-            <a:ext cx="8498026" cy="222796"/>
+            <a:off x="634901" y="883593"/>
+            <a:ext cx="8102798" cy="281880"/>
           </a:xfrm>
           <a:prstGeom prst="rect">
             <a:avLst/>
@@ -3569,13 +4963,31 @@
           <a:bodyPr wrap="square" lIns="0" tIns="0" rIns="0" bIns="0" rtlCol="0" anchor="t"/>
           <a:lstStyle/>
           <a:p>
+            <a:pPr algn="l" marL="342900" indent="-342900">
+              <a:lnSpc>
+                <a:spcPts val="1620"/>
+              </a:lnSpc>
+              <a:spcAft>
+                <a:spcPts val="300"/>
+              </a:spcAft>
+              <a:buSzPct val="100000"/>
+              <a:buChar char="•"/>
+            </a:pPr>
+            <a:r>
+              <a:rPr lang="en-US" sz="1200" i="1" dirty="0">
+                <a:solidFill>
+                  <a:srgbClr val="1A1A1A"/>
+                </a:solidFill>
+                <a:latin typeface="Georgia" pitchFamily="34" charset="0"/>
+                <a:ea typeface="Georgia" pitchFamily="34" charset="-122"/>
+                <a:cs typeface="Georgia" pitchFamily="34" charset="-120"/>
+              </a:rPr>
+              <a:t>anvayana</a:t>
+            </a:r>
             <a:pPr algn="l" indent="0" marL="0">
               <a:lnSpc>
-                <a:spcPts val="1680"/>
-              </a:lnSpc>
-              <a:spcBef>
-                <a:spcPts val="300"/>
-              </a:spcBef>
+                <a:spcPts val="1620"/>
+              </a:lnSpc>
               <a:spcAft>
                 <a:spcPts val="300"/>
               </a:spcAft>
@@ -3590,99 +5002,7 @@
                 <a:ea typeface="Georgia" pitchFamily="34" charset="-122"/>
                 <a:cs typeface="Georgia" pitchFamily="34" charset="-120"/>
               </a:rPr>
-              <a:t>From </a:t>
-            </a:r>
-            <a:pPr algn="l" indent="0" marL="0">
-              <a:lnSpc>
-                <a:spcPts val="1680"/>
-              </a:lnSpc>
-              <a:spcBef>
-                <a:spcPts val="300"/>
-              </a:spcBef>
-              <a:spcAft>
-                <a:spcPts val="300"/>
-              </a:spcAft>
-              <a:buNone/>
-            </a:pPr>
-            <a:r>
-              <a:rPr lang="en-US" sz="1200" i="1" dirty="0">
-                <a:solidFill>
-                  <a:srgbClr val="1A1A1A"/>
-                </a:solidFill>
-                <a:latin typeface="Georgia" pitchFamily="34" charset="0"/>
-                <a:ea typeface="Georgia" pitchFamily="34" charset="-122"/>
-                <a:cs typeface="Georgia" pitchFamily="34" charset="-120"/>
-              </a:rPr>
-              <a:t>All Modules 1–14 of this curriculum</a:t>
-            </a:r>
-            <a:pPr algn="l" indent="0" marL="0">
-              <a:lnSpc>
-                <a:spcPts val="1680"/>
-              </a:lnSpc>
-              <a:spcBef>
-                <a:spcPts val="300"/>
-              </a:spcBef>
-              <a:spcAft>
-                <a:spcPts val="300"/>
-              </a:spcAft>
-              <a:buNone/>
-            </a:pPr>
-            <a:r>
-              <a:rPr lang="en-US" sz="1200" dirty="0">
-                <a:solidFill>
-                  <a:srgbClr val="1A1A1A"/>
-                </a:solidFill>
-                <a:latin typeface="Georgia" pitchFamily="34" charset="0"/>
-                <a:ea typeface="Georgia" pitchFamily="34" charset="-122"/>
-                <a:cs typeface="Georgia" pitchFamily="34" charset="-120"/>
-              </a:rPr>
-              <a:t> — see </a:t>
-            </a:r>
-            <a:pPr algn="l" indent="0" marL="0">
-              <a:lnSpc>
-                <a:spcPts val="1680"/>
-              </a:lnSpc>
-              <a:spcBef>
-                <a:spcPts val="300"/>
-              </a:spcBef>
-              <a:spcAft>
-                <a:spcPts val="300"/>
-              </a:spcAft>
-              <a:buNone/>
-            </a:pPr>
-            <a:r>
-              <a:rPr lang="en-US" sz="1200" dirty="0">
-                <a:solidFill>
-                  <a:srgbClr val="1A1A1A"/>
-                </a:solidFill>
-                <a:latin typeface="Georgia" pitchFamily="34" charset="0"/>
-                <a:ea typeface="Georgia" pitchFamily="34" charset="-122"/>
-                <a:cs typeface="Georgia" pitchFamily="34" charset="-120"/>
-              </a:rPr>
-              <a:t>sources.md</a:t>
-            </a:r>
-            <a:pPr algn="l" indent="0" marL="0">
-              <a:lnSpc>
-                <a:spcPts val="1680"/>
-              </a:lnSpc>
-              <a:spcBef>
-                <a:spcPts val="300"/>
-              </a:spcBef>
-              <a:spcAft>
-                <a:spcPts val="300"/>
-              </a:spcAft>
-              <a:buNone/>
-            </a:pPr>
-            <a:r>
-              <a:rPr lang="en-US" sz="1200" dirty="0">
-                <a:solidFill>
-                  <a:srgbClr val="1A1A1A"/>
-                </a:solidFill>
-                <a:latin typeface="Georgia" pitchFamily="34" charset="0"/>
-                <a:ea typeface="Georgia" pitchFamily="34" charset="-122"/>
-                <a:cs typeface="Georgia" pitchFamily="34" charset="-120"/>
-              </a:rPr>
-              <a:t>.</a:t>
+              <a:t> (IAST: anvayana; lit. "integration / following-through; capstone synthesis")</a:t>
             </a:r>
             <a:endParaRPr lang="en-US" sz="1200" dirty="0"/>
           </a:p>
@@ -3840,7 +5160,7 @@
                 <a:ea typeface="Times New Roman" pitchFamily="34" charset="-122"/>
                 <a:cs typeface="Times New Roman" pitchFamily="34" charset="-120"/>
               </a:rPr>
-              <a:t>Lesson flow</a:t>
+              <a:t>Primary source (today's reading)</a:t>
             </a:r>
             <a:endParaRPr lang="en-US" sz="1800" dirty="0"/>
           </a:p>
@@ -3849,6 +5169,146 @@
       <p:sp>
         <p:nvSpPr>
           <p:cNvPr id="4" name="Text 2"/>
+          <p:cNvSpPr/>
+          <p:nvPr/>
+        </p:nvSpPr>
+        <p:spPr>
+          <a:xfrm>
+            <a:off x="406301" y="870942"/>
+            <a:ext cx="8498026" cy="222796"/>
+          </a:xfrm>
+          <a:prstGeom prst="rect">
+            <a:avLst/>
+          </a:prstGeom>
+          <a:noFill/>
+          <a:ln/>
+        </p:spPr>
+        <p:txBody>
+          <a:bodyPr wrap="square" lIns="0" tIns="0" rIns="0" bIns="0" rtlCol="0" anchor="t"/>
+          <a:lstStyle/>
+          <a:p>
+            <a:pPr algn="l" indent="0" marL="0">
+              <a:lnSpc>
+                <a:spcPts val="1680"/>
+              </a:lnSpc>
+              <a:spcBef>
+                <a:spcPts val="300"/>
+              </a:spcBef>
+              <a:spcAft>
+                <a:spcPts val="300"/>
+              </a:spcAft>
+              <a:buNone/>
+            </a:pPr>
+            <a:r>
+              <a:rPr lang="en-US" sz="1200" dirty="0">
+                <a:solidFill>
+                  <a:srgbClr val="1A1A1A"/>
+                </a:solidFill>
+                <a:latin typeface="Georgia" pitchFamily="34" charset="0"/>
+                <a:ea typeface="Georgia" pitchFamily="34" charset="-122"/>
+                <a:cs typeface="Georgia" pitchFamily="34" charset="-120"/>
+              </a:rPr>
+              <a:t>From </a:t>
+            </a:r>
+            <a:pPr algn="l" indent="0" marL="0">
+              <a:lnSpc>
+                <a:spcPts val="1680"/>
+              </a:lnSpc>
+              <a:spcBef>
+                <a:spcPts val="300"/>
+              </a:spcBef>
+              <a:spcAft>
+                <a:spcPts val="300"/>
+              </a:spcAft>
+              <a:buNone/>
+            </a:pPr>
+            <a:r>
+              <a:rPr lang="en-US" sz="1200" i="1" dirty="0">
+                <a:solidFill>
+                  <a:srgbClr val="1A1A1A"/>
+                </a:solidFill>
+                <a:latin typeface="Georgia" pitchFamily="34" charset="0"/>
+                <a:ea typeface="Georgia" pitchFamily="34" charset="-122"/>
+                <a:cs typeface="Georgia" pitchFamily="34" charset="-120"/>
+              </a:rPr>
+              <a:t>All Modules 1–14 of this curriculum</a:t>
+            </a:r>
+            <a:pPr algn="l" indent="0" marL="0">
+              <a:lnSpc>
+                <a:spcPts val="1680"/>
+              </a:lnSpc>
+              <a:spcBef>
+                <a:spcPts val="300"/>
+              </a:spcBef>
+              <a:spcAft>
+                <a:spcPts val="300"/>
+              </a:spcAft>
+              <a:buNone/>
+            </a:pPr>
+            <a:r>
+              <a:rPr lang="en-US" sz="1200" dirty="0">
+                <a:solidFill>
+                  <a:srgbClr val="1A1A1A"/>
+                </a:solidFill>
+                <a:latin typeface="Georgia" pitchFamily="34" charset="0"/>
+                <a:ea typeface="Georgia" pitchFamily="34" charset="-122"/>
+                <a:cs typeface="Georgia" pitchFamily="34" charset="-120"/>
+              </a:rPr>
+              <a:t> — see </a:t>
+            </a:r>
+            <a:pPr algn="l" indent="0" marL="0">
+              <a:lnSpc>
+                <a:spcPts val="1680"/>
+              </a:lnSpc>
+              <a:spcBef>
+                <a:spcPts val="300"/>
+              </a:spcBef>
+              <a:spcAft>
+                <a:spcPts val="300"/>
+              </a:spcAft>
+              <a:buNone/>
+            </a:pPr>
+            <a:r>
+              <a:rPr lang="en-US" sz="1200" dirty="0">
+                <a:solidFill>
+                  <a:srgbClr val="1A1A1A"/>
+                </a:solidFill>
+                <a:latin typeface="Georgia" pitchFamily="34" charset="0"/>
+                <a:ea typeface="Georgia" pitchFamily="34" charset="-122"/>
+                <a:cs typeface="Georgia" pitchFamily="34" charset="-120"/>
+              </a:rPr>
+              <a:t>sources.md</a:t>
+            </a:r>
+            <a:pPr algn="l" indent="0" marL="0">
+              <a:lnSpc>
+                <a:spcPts val="1680"/>
+              </a:lnSpc>
+              <a:spcBef>
+                <a:spcPts val="300"/>
+              </a:spcBef>
+              <a:spcAft>
+                <a:spcPts val="300"/>
+              </a:spcAft>
+              <a:buNone/>
+            </a:pPr>
+            <a:r>
+              <a:rPr lang="en-US" sz="1200" dirty="0">
+                <a:solidFill>
+                  <a:srgbClr val="1A1A1A"/>
+                </a:solidFill>
+                <a:latin typeface="Georgia" pitchFamily="34" charset="0"/>
+                <a:ea typeface="Georgia" pitchFamily="34" charset="-122"/>
+                <a:cs typeface="Georgia" pitchFamily="34" charset="-120"/>
+              </a:rPr>
+              <a:t>.</a:t>
+            </a:r>
+            <a:endParaRPr lang="en-US" sz="1200" dirty="0"/>
+          </a:p>
+        </p:txBody>
+      </p:sp>
+      <p:sp>
+        <p:nvSpPr>
+          <p:cNvPr id="5" name="Text 3"/>
           <p:cNvSpPr/>
           <p:nvPr/>
         </p:nvSpPr>
@@ -3998,7 +5458,7 @@
                 <a:ea typeface="Times New Roman" pitchFamily="34" charset="-122"/>
                 <a:cs typeface="Times New Roman" pitchFamily="34" charset="-120"/>
               </a:rPr>
-              <a:t>Warm-up (5 min)</a:t>
+              <a:t>Lesson flow</a:t>
             </a:r>
             <a:endParaRPr lang="en-US" sz="1800" dirty="0"/>
           </a:p>
@@ -4007,100 +5467,6 @@
       <p:sp>
         <p:nvSpPr>
           <p:cNvPr id="4" name="Text 2"/>
-          <p:cNvSpPr/>
-          <p:nvPr/>
-        </p:nvSpPr>
-        <p:spPr>
-          <a:xfrm>
-            <a:off x="406301" y="870942"/>
-            <a:ext cx="8498026" cy="426541"/>
-          </a:xfrm>
-          <a:prstGeom prst="rect">
-            <a:avLst/>
-          </a:prstGeom>
-          <a:noFill/>
-          <a:ln/>
-        </p:spPr>
-        <p:txBody>
-          <a:bodyPr wrap="square" lIns="0" tIns="0" rIns="0" bIns="0" rtlCol="0" anchor="t"/>
-          <a:lstStyle/>
-          <a:p>
-            <a:pPr algn="l" indent="0" marL="0">
-              <a:lnSpc>
-                <a:spcPts val="1680"/>
-              </a:lnSpc>
-              <a:spcBef>
-                <a:spcPts val="300"/>
-              </a:spcBef>
-              <a:spcAft>
-                <a:spcPts val="300"/>
-              </a:spcAft>
-              <a:buNone/>
-            </a:pPr>
-            <a:r>
-              <a:rPr lang="en-US" sz="1200" dirty="0">
-                <a:solidFill>
-                  <a:srgbClr val="1A1A1A"/>
-                </a:solidFill>
-                <a:latin typeface="Georgia" pitchFamily="34" charset="0"/>
-                <a:ea typeface="Georgia" pitchFamily="34" charset="-122"/>
-                <a:cs typeface="Georgia" pitchFamily="34" charset="-120"/>
-              </a:rPr>
-              <a:t>– Daily check-in: one-sentence response to </a:t>
-            </a:r>
-            <a:pPr algn="l" indent="0" marL="0">
-              <a:lnSpc>
-                <a:spcPts val="1680"/>
-              </a:lnSpc>
-              <a:spcBef>
-                <a:spcPts val="300"/>
-              </a:spcBef>
-              <a:spcAft>
-                <a:spcPts val="300"/>
-              </a:spcAft>
-              <a:buNone/>
-            </a:pPr>
-            <a:r>
-              <a:rPr lang="en-US" sz="1200" i="1" dirty="0">
-                <a:solidFill>
-                  <a:srgbClr val="1A1A1A"/>
-                </a:solidFill>
-                <a:latin typeface="Georgia" pitchFamily="34" charset="0"/>
-                <a:ea typeface="Georgia" pitchFamily="34" charset="-122"/>
-                <a:cs typeface="Georgia" pitchFamily="34" charset="-120"/>
-              </a:rPr>
-              <a:t>"What's one thing you remember about yesterday's lesson?"</a:t>
-            </a:r>
-            <a:pPr algn="l" indent="0" marL="0">
-              <a:lnSpc>
-                <a:spcPts val="1680"/>
-              </a:lnSpc>
-              <a:spcBef>
-                <a:spcPts val="300"/>
-              </a:spcBef>
-              <a:spcAft>
-                <a:spcPts val="300"/>
-              </a:spcAft>
-              <a:buNone/>
-            </a:pPr>
-            <a:r>
-              <a:rPr lang="en-US" sz="1200" dirty="0">
-                <a:solidFill>
-                  <a:srgbClr val="1A1A1A"/>
-                </a:solidFill>
-                <a:latin typeface="Georgia" pitchFamily="34" charset="0"/>
-                <a:ea typeface="Georgia" pitchFamily="34" charset="-122"/>
-                <a:cs typeface="Georgia" pitchFamily="34" charset="-120"/>
-              </a:rPr>
-              <a:t> – Hook: introduce a phenomenon or question that motivates today's concept.</a:t>
-            </a:r>
-            <a:endParaRPr lang="en-US" sz="1200" dirty="0"/>
-          </a:p>
-        </p:txBody>
-      </p:sp>
-      <p:sp>
-        <p:nvSpPr>
-          <p:cNvPr id="5" name="Text 3"/>
           <p:cNvSpPr/>
           <p:nvPr/>
         </p:nvSpPr>
@@ -4250,7 +5616,7 @@
                 <a:ea typeface="Times New Roman" pitchFamily="34" charset="-122"/>
                 <a:cs typeface="Times New Roman" pitchFamily="34" charset="-120"/>
               </a:rPr>
-              <a:t>Core (20 min)</a:t>
+              <a:t>Warm-up (5 min)</a:t>
             </a:r>
             <a:endParaRPr lang="en-US" sz="1800" dirty="0"/>
           </a:p>
@@ -4265,7 +5631,7 @@
         <p:spPr>
           <a:xfrm>
             <a:off x="634901" y="883593"/>
-            <a:ext cx="8102798" cy="487561"/>
+            <a:ext cx="8102798" cy="525661"/>
           </a:xfrm>
           <a:prstGeom prst="rect">
             <a:avLst/>
@@ -4288,15 +5654,15 @@
               <a:buChar char="•"/>
             </a:pPr>
             <a:r>
-              <a:rPr lang="en-US" sz="1200" b="1" dirty="0">
-                <a:solidFill>
-                  <a:srgbClr val="1A1A1A"/>
-                </a:solidFill>
-                <a:latin typeface="Georgia" pitchFamily="34" charset="0"/>
-                <a:ea typeface="Georgia" pitchFamily="34" charset="-122"/>
-                <a:cs typeface="Georgia" pitchFamily="34" charset="-120"/>
-              </a:rPr>
-              <a:t>Capstone overview.</a:t>
+              <a:rPr lang="en-US" sz="1200" dirty="0">
+                <a:solidFill>
+                  <a:srgbClr val="1A1A1A"/>
+                </a:solidFill>
+                <a:latin typeface="Georgia" pitchFamily="34" charset="0"/>
+                <a:ea typeface="Georgia" pitchFamily="34" charset="-122"/>
+                <a:cs typeface="Georgia" pitchFamily="34" charset="-120"/>
+              </a:rPr>
+              <a:t>Daily check-in: one-sentence response to </a:t>
             </a:r>
             <a:pPr algn="l" indent="0" marL="0">
               <a:lnSpc>
@@ -4308,40 +5674,18 @@
               <a:buNone/>
             </a:pPr>
             <a:r>
-              <a:rPr lang="en-US" sz="1200" dirty="0">
-                <a:solidFill>
-                  <a:srgbClr val="1A1A1A"/>
-                </a:solidFill>
-                <a:latin typeface="Georgia" pitchFamily="34" charset="0"/>
-                <a:ea typeface="Georgia" pitchFamily="34" charset="-122"/>
-                <a:cs typeface="Georgia" pitchFamily="34" charset="-120"/>
-              </a:rPr>
-              <a:t> This module is different. No new content delivery. Instead: 10 days of structured project work, applying what you learned from Modules 1–14.</a:t>
+              <a:rPr lang="en-US" sz="1200" i="1" dirty="0">
+                <a:solidFill>
+                  <a:srgbClr val="1A1A1A"/>
+                </a:solidFill>
+                <a:latin typeface="Georgia" pitchFamily="34" charset="0"/>
+                <a:ea typeface="Georgia" pitchFamily="34" charset="-122"/>
+                <a:cs typeface="Georgia" pitchFamily="34" charset="-120"/>
+              </a:rPr>
+              <a:t>"What's one thing you remember about yesterday's lesson?"</a:t>
             </a:r>
             <a:endParaRPr lang="en-US" sz="1200" dirty="0"/>
           </a:p>
-        </p:txBody>
-      </p:sp>
-      <p:sp>
-        <p:nvSpPr>
-          <p:cNvPr id="5" name="Text 3"/>
-          <p:cNvSpPr/>
-          <p:nvPr/>
-        </p:nvSpPr>
-        <p:spPr>
-          <a:xfrm>
-            <a:off x="634901" y="1472654"/>
-            <a:ext cx="8102798" cy="281880"/>
-          </a:xfrm>
-          <a:prstGeom prst="rect">
-            <a:avLst/>
-          </a:prstGeom>
-          <a:noFill/>
-          <a:ln/>
-        </p:spPr>
-        <p:txBody>
-          <a:bodyPr wrap="square" lIns="0" tIns="0" rIns="0" bIns="0" rtlCol="0" anchor="t"/>
-          <a:lstStyle/>
           <a:p>
             <a:pPr algn="l" marL="342900" indent="-342900">
               <a:lnSpc>
@@ -4354,26 +5698,6 @@
               <a:buChar char="•"/>
             </a:pPr>
             <a:r>
-              <a:rPr lang="en-US" sz="1200" b="1" dirty="0">
-                <a:solidFill>
-                  <a:srgbClr val="1A1A1A"/>
-                </a:solidFill>
-                <a:latin typeface="Georgia" pitchFamily="34" charset="0"/>
-                <a:ea typeface="Georgia" pitchFamily="34" charset="-122"/>
-                <a:cs typeface="Georgia" pitchFamily="34" charset="-120"/>
-              </a:rPr>
-              <a:t>Walk through the 10-option project menu.</a:t>
-            </a:r>
-            <a:pPr algn="l" indent="0" marL="0">
-              <a:lnSpc>
-                <a:spcPts val="1620"/>
-              </a:lnSpc>
-              <a:spcAft>
-                <a:spcPts val="300"/>
-              </a:spcAft>
-              <a:buNone/>
-            </a:pPr>
-            <a:r>
               <a:rPr lang="en-US" sz="1200" dirty="0">
                 <a:solidFill>
                   <a:srgbClr val="1A1A1A"/>
@@ -4382,7 +5706,7 @@
                 <a:ea typeface="Georgia" pitchFamily="34" charset="-122"/>
                 <a:cs typeface="Georgia" pitchFamily="34" charset="-120"/>
               </a:rPr>
-              <a:t> Read each, with a 1-minute description per option:</a:t>
+              <a:t>Hook: introduce a phenomenon or question that motivates today's concept.</a:t>
             </a:r>
             <a:endParaRPr lang="en-US" sz="1200" dirty="0"/>
           </a:p>
@@ -4390,253 +5714,7 @@
       </p:sp>
       <p:sp>
         <p:nvSpPr>
-          <p:cNvPr id="6" name="Text 4"/>
-          <p:cNvSpPr/>
-          <p:nvPr/>
-        </p:nvSpPr>
-        <p:spPr>
-          <a:xfrm>
-            <a:off x="406301" y="1843385"/>
-            <a:ext cx="8498026" cy="639812"/>
-          </a:xfrm>
-          <a:prstGeom prst="rect">
-            <a:avLst/>
-          </a:prstGeom>
-          <a:noFill/>
-          <a:ln/>
-        </p:spPr>
-        <p:txBody>
-          <a:bodyPr wrap="square" lIns="0" tIns="0" rIns="0" bIns="0" rtlCol="0" anchor="t"/>
-          <a:lstStyle/>
-          <a:p>
-            <a:pPr algn="l" indent="0" marL="0">
-              <a:lnSpc>
-                <a:spcPts val="1680"/>
-              </a:lnSpc>
-              <a:spcBef>
-                <a:spcPts val="300"/>
-              </a:spcBef>
-              <a:spcAft>
-                <a:spcPts val="300"/>
-              </a:spcAft>
-              <a:buNone/>
-            </a:pPr>
-            <a:r>
-              <a:rPr lang="en-US" sz="1200" dirty="0">
-                <a:solidFill>
-                  <a:srgbClr val="1A1A1A"/>
-                </a:solidFill>
-                <a:latin typeface="Georgia" pitchFamily="34" charset="0"/>
-                <a:ea typeface="Georgia" pitchFamily="34" charset="-122"/>
-                <a:cs typeface="Georgia" pitchFamily="34" charset="-120"/>
-              </a:rPr>
-              <a:t>– Pañcagavya kitchen science → SUBSTITUTED with fermented-foods study (safety)    – Mandala / Pṛthvī geometry    – Tithi/festival calendar    – Herb identification card-deck    – Magic-square art    – Yoga sequence design    – Sustainability audit    – Doshic self-study    – Multiplication-method comparison    – Open-design (your own)</a:t>
-            </a:r>
-            <a:endParaRPr lang="en-US" sz="1200" dirty="0"/>
-          </a:p>
-        </p:txBody>
-      </p:sp>
-      <p:sp>
-        <p:nvSpPr>
-          <p:cNvPr id="7" name="Text 5"/>
-          <p:cNvSpPr/>
-          <p:nvPr/>
-        </p:nvSpPr>
-        <p:spPr>
-          <a:xfrm>
-            <a:off x="634901" y="2572048"/>
-            <a:ext cx="8102798" cy="487561"/>
-          </a:xfrm>
-          <a:prstGeom prst="rect">
-            <a:avLst/>
-          </a:prstGeom>
-          <a:noFill/>
-          <a:ln/>
-        </p:spPr>
-        <p:txBody>
-          <a:bodyPr wrap="square" lIns="0" tIns="0" rIns="0" bIns="0" rtlCol="0" anchor="t"/>
-          <a:lstStyle/>
-          <a:p>
-            <a:pPr algn="l" marL="342900" indent="-342900">
-              <a:lnSpc>
-                <a:spcPts val="1620"/>
-              </a:lnSpc>
-              <a:spcAft>
-                <a:spcPts val="300"/>
-              </a:spcAft>
-              <a:buSzPct val="100000"/>
-              <a:buChar char="•"/>
-            </a:pPr>
-            <a:r>
-              <a:rPr lang="en-US" sz="1200" b="1" dirty="0">
-                <a:solidFill>
-                  <a:srgbClr val="1A1A1A"/>
-                </a:solidFill>
-                <a:latin typeface="Georgia" pitchFamily="34" charset="0"/>
-                <a:ea typeface="Georgia" pitchFamily="34" charset="-122"/>
-                <a:cs typeface="Georgia" pitchFamily="34" charset="-120"/>
-              </a:rPr>
-              <a:t>The discipline.</a:t>
-            </a:r>
-            <a:pPr algn="l" indent="0" marL="0">
-              <a:lnSpc>
-                <a:spcPts val="1620"/>
-              </a:lnSpc>
-              <a:spcAft>
-                <a:spcPts val="300"/>
-              </a:spcAft>
-              <a:buNone/>
-            </a:pPr>
-            <a:r>
-              <a:rPr lang="en-US" sz="1200" dirty="0">
-                <a:solidFill>
-                  <a:srgbClr val="1A1A1A"/>
-                </a:solidFill>
-                <a:latin typeface="Georgia" pitchFamily="34" charset="0"/>
-                <a:ea typeface="Georgia" pitchFamily="34" charset="-122"/>
-                <a:cs typeface="Georgia" pitchFamily="34" charset="-120"/>
-              </a:rPr>
-              <a:t> Each project requires: scope, research, design, build, document, present. Daily journal. Source citations.</a:t>
-            </a:r>
-            <a:endParaRPr lang="en-US" sz="1200" dirty="0"/>
-          </a:p>
-        </p:txBody>
-      </p:sp>
-      <p:sp>
-        <p:nvSpPr>
-          <p:cNvPr id="8" name="Text 6"/>
-          <p:cNvSpPr/>
-          <p:nvPr/>
-        </p:nvSpPr>
-        <p:spPr>
-          <a:xfrm>
-            <a:off x="634901" y="3161109"/>
-            <a:ext cx="8102798" cy="487561"/>
-          </a:xfrm>
-          <a:prstGeom prst="rect">
-            <a:avLst/>
-          </a:prstGeom>
-          <a:noFill/>
-          <a:ln/>
-        </p:spPr>
-        <p:txBody>
-          <a:bodyPr wrap="square" lIns="0" tIns="0" rIns="0" bIns="0" rtlCol="0" anchor="t"/>
-          <a:lstStyle/>
-          <a:p>
-            <a:pPr algn="l" marL="342900" indent="-342900">
-              <a:lnSpc>
-                <a:spcPts val="1620"/>
-              </a:lnSpc>
-              <a:spcAft>
-                <a:spcPts val="300"/>
-              </a:spcAft>
-              <a:buSzPct val="100000"/>
-              <a:buChar char="•"/>
-            </a:pPr>
-            <a:r>
-              <a:rPr lang="en-US" sz="1200" b="1" dirty="0">
-                <a:solidFill>
-                  <a:srgbClr val="1A1A1A"/>
-                </a:solidFill>
-                <a:latin typeface="Georgia" pitchFamily="34" charset="0"/>
-                <a:ea typeface="Georgia" pitchFamily="34" charset="-122"/>
-                <a:cs typeface="Georgia" pitchFamily="34" charset="-120"/>
-              </a:rPr>
-              <a:t>The safety floor.</a:t>
-            </a:r>
-            <a:pPr algn="l" indent="0" marL="0">
-              <a:lnSpc>
-                <a:spcPts val="1620"/>
-              </a:lnSpc>
-              <a:spcAft>
-                <a:spcPts val="300"/>
-              </a:spcAft>
-              <a:buNone/>
-            </a:pPr>
-            <a:r>
-              <a:rPr lang="en-US" sz="1200" dirty="0">
-                <a:solidFill>
-                  <a:srgbClr val="1A1A1A"/>
-                </a:solidFill>
-                <a:latin typeface="Georgia" pitchFamily="34" charset="0"/>
-                <a:ea typeface="Georgia" pitchFamily="34" charset="-122"/>
-                <a:cs typeface="Georgia" pitchFamily="34" charset="-120"/>
-              </a:rPr>
-              <a:t> Pañcagavya — NEVER cow-urine ingestion in school. Use comparative fermented-foods study (curd, paneer, batter — biochemically interesting and safe).</a:t>
-            </a:r>
-            <a:endParaRPr lang="en-US" sz="1200" dirty="0"/>
-          </a:p>
-        </p:txBody>
-      </p:sp>
-      <p:sp>
-        <p:nvSpPr>
-          <p:cNvPr id="9" name="Text 7"/>
-          <p:cNvSpPr/>
-          <p:nvPr/>
-        </p:nvSpPr>
-        <p:spPr>
-          <a:xfrm>
-            <a:off x="634901" y="3750171"/>
-            <a:ext cx="8102798" cy="487561"/>
-          </a:xfrm>
-          <a:prstGeom prst="rect">
-            <a:avLst/>
-          </a:prstGeom>
-          <a:noFill/>
-          <a:ln/>
-        </p:spPr>
-        <p:txBody>
-          <a:bodyPr wrap="square" lIns="0" tIns="0" rIns="0" bIns="0" rtlCol="0" anchor="t"/>
-          <a:lstStyle/>
-          <a:p>
-            <a:pPr algn="l" marL="342900" indent="-342900">
-              <a:lnSpc>
-                <a:spcPts val="1620"/>
-              </a:lnSpc>
-              <a:spcAft>
-                <a:spcPts val="300"/>
-              </a:spcAft>
-              <a:buSzPct val="100000"/>
-              <a:buChar char="•"/>
-            </a:pPr>
-            <a:r>
-              <a:rPr lang="en-US" sz="1200" b="1" dirty="0">
-                <a:solidFill>
-                  <a:srgbClr val="1A1A1A"/>
-                </a:solidFill>
-                <a:latin typeface="Georgia" pitchFamily="34" charset="0"/>
-                <a:ea typeface="Georgia" pitchFamily="34" charset="-122"/>
-                <a:cs typeface="Georgia" pitchFamily="34" charset="-120"/>
-              </a:rPr>
-              <a:t>Today's task.</a:t>
-            </a:r>
-            <a:pPr algn="l" indent="0" marL="0">
-              <a:lnSpc>
-                <a:spcPts val="1620"/>
-              </a:lnSpc>
-              <a:spcAft>
-                <a:spcPts val="300"/>
-              </a:spcAft>
-              <a:buNone/>
-            </a:pPr>
-            <a:r>
-              <a:rPr lang="en-US" sz="1200" dirty="0">
-                <a:solidFill>
-                  <a:srgbClr val="1A1A1A"/>
-                </a:solidFill>
-                <a:latin typeface="Georgia" pitchFamily="34" charset="0"/>
-                <a:ea typeface="Georgia" pitchFamily="34" charset="-122"/>
-                <a:cs typeface="Georgia" pitchFamily="34" charset="-120"/>
-              </a:rPr>
-              <a:t> Read all 10 options in detail (printout provided). DON'T pick yet — sleep on it. Tomorrow you'll choose and scope.</a:t>
-            </a:r>
-            <a:endParaRPr lang="en-US" sz="1200" dirty="0"/>
-          </a:p>
-        </p:txBody>
-      </p:sp>
-      <p:sp>
-        <p:nvSpPr>
-          <p:cNvPr id="10" name="Text 8"/>
+          <p:cNvPr id="5" name="Text 3"/>
           <p:cNvSpPr/>
           <p:nvPr/>
         </p:nvSpPr>
@@ -4786,7 +5864,7 @@
                 <a:ea typeface="Times New Roman" pitchFamily="34" charset="-122"/>
                 <a:cs typeface="Times New Roman" pitchFamily="34" charset="-120"/>
               </a:rPr>
-              <a:t>Activity (15 min)</a:t>
+              <a:t>Core (20 min)</a:t>
             </a:r>
             <a:endParaRPr lang="en-US" sz="1800" dirty="0"/>
           </a:p>
@@ -4800,8 +5878,8 @@
         </p:nvSpPr>
         <p:spPr>
           <a:xfrm>
-            <a:off x="406301" y="870942"/>
-            <a:ext cx="8498026" cy="436066"/>
+            <a:off x="634901" y="883593"/>
+            <a:ext cx="8102798" cy="487561"/>
           </a:xfrm>
           <a:prstGeom prst="rect">
             <a:avLst/>
@@ -4813,13 +5891,31 @@
           <a:bodyPr wrap="square" lIns="0" tIns="0" rIns="0" bIns="0" rtlCol="0" anchor="t"/>
           <a:lstStyle/>
           <a:p>
+            <a:pPr algn="l" marL="342900" indent="-342900">
+              <a:lnSpc>
+                <a:spcPts val="1620"/>
+              </a:lnSpc>
+              <a:spcAft>
+                <a:spcPts val="300"/>
+              </a:spcAft>
+              <a:buSzPct val="100000"/>
+              <a:buChar char="•"/>
+            </a:pPr>
+            <a:r>
+              <a:rPr lang="en-US" sz="1200" b="1" dirty="0">
+                <a:solidFill>
+                  <a:srgbClr val="1A1A1A"/>
+                </a:solidFill>
+                <a:latin typeface="Georgia" pitchFamily="34" charset="0"/>
+                <a:ea typeface="Georgia" pitchFamily="34" charset="-122"/>
+                <a:cs typeface="Georgia" pitchFamily="34" charset="-120"/>
+              </a:rPr>
+              <a:t>Capstone overview.</a:t>
+            </a:r>
             <a:pPr algn="l" indent="0" marL="0">
               <a:lnSpc>
-                <a:spcPts val="1680"/>
-              </a:lnSpc>
-              <a:spcBef>
-                <a:spcPts val="300"/>
-              </a:spcBef>
+                <a:spcPts val="1620"/>
+              </a:lnSpc>
               <a:spcAft>
                 <a:spcPts val="300"/>
               </a:spcAft>
@@ -4834,99 +5930,7 @@
                 <a:ea typeface="Georgia" pitchFamily="34" charset="-122"/>
                 <a:cs typeface="Georgia" pitchFamily="34" charset="-120"/>
               </a:rPr>
-              <a:t>A scaled version of </a:t>
-            </a:r>
-            <a:pPr algn="l" indent="0" marL="0">
-              <a:lnSpc>
-                <a:spcPts val="1680"/>
-              </a:lnSpc>
-              <a:spcBef>
-                <a:spcPts val="300"/>
-              </a:spcBef>
-              <a:spcAft>
-                <a:spcPts val="300"/>
-              </a:spcAft>
-              <a:buNone/>
-            </a:pPr>
-            <a:r>
-              <a:rPr lang="en-US" sz="1200" i="1" dirty="0">
-                <a:solidFill>
-                  <a:srgbClr val="1A1A1A"/>
-                </a:solidFill>
-                <a:latin typeface="Georgia" pitchFamily="34" charset="0"/>
-                <a:ea typeface="Georgia" pitchFamily="34" charset="-122"/>
-                <a:cs typeface="Georgia" pitchFamily="34" charset="-120"/>
-              </a:rPr>
-              <a:t>Mid-Project Critique Circle</a:t>
-            </a:r>
-            <a:pPr algn="l" indent="0" marL="0">
-              <a:lnSpc>
-                <a:spcPts val="1680"/>
-              </a:lnSpc>
-              <a:spcBef>
-                <a:spcPts val="300"/>
-              </a:spcBef>
-              <a:spcAft>
-                <a:spcPts val="300"/>
-              </a:spcAft>
-              <a:buNone/>
-            </a:pPr>
-            <a:r>
-              <a:rPr lang="en-US" sz="1200" dirty="0">
-                <a:solidFill>
-                  <a:srgbClr val="1A1A1A"/>
-                </a:solidFill>
-                <a:latin typeface="Georgia" pitchFamily="34" charset="0"/>
-                <a:ea typeface="Georgia" pitchFamily="34" charset="-122"/>
-                <a:cs typeface="Georgia" pitchFamily="34" charset="-120"/>
-              </a:rPr>
-              <a:t> (see </a:t>
-            </a:r>
-            <a:pPr algn="l" indent="0" marL="0">
-              <a:lnSpc>
-                <a:spcPts val="1680"/>
-              </a:lnSpc>
-              <a:spcBef>
-                <a:spcPts val="300"/>
-              </a:spcBef>
-              <a:spcAft>
-                <a:spcPts val="300"/>
-              </a:spcAft>
-              <a:buNone/>
-            </a:pPr>
-            <a:r>
-              <a:rPr lang="en-US" sz="1200" dirty="0">
-                <a:solidFill>
-                  <a:srgbClr val="1A1A1A"/>
-                </a:solidFill>
-                <a:latin typeface="Georgia" pitchFamily="34" charset="0"/>
-                <a:ea typeface="Georgia" pitchFamily="34" charset="-122"/>
-                <a:cs typeface="Georgia" pitchFamily="34" charset="-120"/>
-              </a:rPr>
-              <a:t>activities/</a:t>
-            </a:r>
-            <a:pPr algn="l" indent="0" marL="0">
-              <a:lnSpc>
-                <a:spcPts val="1680"/>
-              </a:lnSpc>
-              <a:spcBef>
-                <a:spcPts val="300"/>
-              </a:spcBef>
-              <a:spcAft>
-                <a:spcPts val="300"/>
-              </a:spcAft>
-              <a:buNone/>
-            </a:pPr>
-            <a:r>
-              <a:rPr lang="en-US" sz="1200" dirty="0">
-                <a:solidFill>
-                  <a:srgbClr val="1A1A1A"/>
-                </a:solidFill>
-                <a:latin typeface="Georgia" pitchFamily="34" charset="0"/>
-                <a:ea typeface="Georgia" pitchFamily="34" charset="-122"/>
-                <a:cs typeface="Georgia" pitchFamily="34" charset="-120"/>
-              </a:rPr>
-              <a:t>). Today's slice: focus on the part of the activity that reinforces Capstone Overview and Project Menu.</a:t>
+              <a:t> This module is different. No new content delivery. Instead: 10 days of structured project work, applying what you learned from Modules 1–14.</a:t>
             </a:r>
             <a:endParaRPr lang="en-US" sz="1200" dirty="0"/>
           </a:p>
@@ -5084,7 +6088,7 @@
                 <a:ea typeface="Times New Roman" pitchFamily="34" charset="-122"/>
                 <a:cs typeface="Times New Roman" pitchFamily="34" charset="-120"/>
               </a:rPr>
-              <a:t>Wrap-up (5 min)</a:t>
+              <a:t>Core (20 min) (cont.)</a:t>
             </a:r>
             <a:endParaRPr lang="en-US" sz="1800" dirty="0"/>
           </a:p>
@@ -5098,8 +6102,8 @@
         </p:nvSpPr>
         <p:spPr>
           <a:xfrm>
-            <a:off x="406301" y="870942"/>
-            <a:ext cx="8498026" cy="213271"/>
+            <a:off x="634901" y="883593"/>
+            <a:ext cx="8102798" cy="281880"/>
           </a:xfrm>
           <a:prstGeom prst="rect">
             <a:avLst/>
@@ -5111,13 +6115,31 @@
           <a:bodyPr wrap="square" lIns="0" tIns="0" rIns="0" bIns="0" rtlCol="0" anchor="t"/>
           <a:lstStyle/>
           <a:p>
+            <a:pPr algn="l" marL="342900" indent="-342900">
+              <a:lnSpc>
+                <a:spcPts val="1620"/>
+              </a:lnSpc>
+              <a:spcAft>
+                <a:spcPts val="300"/>
+              </a:spcAft>
+              <a:buSzPct val="100000"/>
+              <a:buChar char="•"/>
+            </a:pPr>
+            <a:r>
+              <a:rPr lang="en-US" sz="1200" b="1" dirty="0">
+                <a:solidFill>
+                  <a:srgbClr val="1A1A1A"/>
+                </a:solidFill>
+                <a:latin typeface="Georgia" pitchFamily="34" charset="0"/>
+                <a:ea typeface="Georgia" pitchFamily="34" charset="-122"/>
+                <a:cs typeface="Georgia" pitchFamily="34" charset="-120"/>
+              </a:rPr>
+              <a:t>Walk through the 10-option project menu.</a:t>
+            </a:r>
             <a:pPr algn="l" indent="0" marL="0">
               <a:lnSpc>
-                <a:spcPts val="1680"/>
-              </a:lnSpc>
-              <a:spcBef>
-                <a:spcPts val="300"/>
-              </a:spcBef>
+                <a:spcPts val="1620"/>
+              </a:lnSpc>
               <a:spcAft>
                 <a:spcPts val="300"/>
               </a:spcAft>
@@ -5132,42 +6154,42 @@
                 <a:ea typeface="Georgia" pitchFamily="34" charset="-122"/>
                 <a:cs typeface="Georgia" pitchFamily="34" charset="-120"/>
               </a:rPr>
-              <a:t>– One-sentence exit ticket: </a:t>
-            </a:r>
-            <a:pPr algn="l" indent="0" marL="0">
-              <a:lnSpc>
-                <a:spcPts val="1680"/>
-              </a:lnSpc>
-              <a:spcBef>
-                <a:spcPts val="300"/>
-              </a:spcBef>
-              <a:spcAft>
-                <a:spcPts val="300"/>
-              </a:spcAft>
-              <a:buNone/>
-            </a:pPr>
-            <a:r>
-              <a:rPr lang="en-US" sz="1200" i="1" dirty="0">
-                <a:solidFill>
-                  <a:srgbClr val="1A1A1A"/>
-                </a:solidFill>
-                <a:latin typeface="Georgia" pitchFamily="34" charset="0"/>
-                <a:ea typeface="Georgia" pitchFamily="34" charset="-122"/>
-                <a:cs typeface="Georgia" pitchFamily="34" charset="-120"/>
-              </a:rPr>
-              <a:t>"What's one thing you learned today?"</a:t>
-            </a:r>
-            <a:pPr algn="l" indent="0" marL="0">
-              <a:lnSpc>
-                <a:spcPts val="1680"/>
-              </a:lnSpc>
-              <a:spcBef>
-                <a:spcPts val="300"/>
-              </a:spcBef>
-              <a:spcAft>
-                <a:spcPts val="300"/>
-              </a:spcAft>
-              <a:buNone/>
+              <a:t> Read each, with a 1-minute description per option:</a:t>
+            </a:r>
+            <a:endParaRPr lang="en-US" sz="1200" dirty="0"/>
+          </a:p>
+        </p:txBody>
+      </p:sp>
+      <p:sp>
+        <p:nvSpPr>
+          <p:cNvPr id="5" name="Text 3"/>
+          <p:cNvSpPr/>
+          <p:nvPr/>
+        </p:nvSpPr>
+        <p:spPr>
+          <a:xfrm>
+            <a:off x="634901" y="1266974"/>
+            <a:ext cx="8102798" cy="1988344"/>
+          </a:xfrm>
+          <a:prstGeom prst="rect">
+            <a:avLst/>
+          </a:prstGeom>
+          <a:noFill/>
+          <a:ln/>
+        </p:spPr>
+        <p:txBody>
+          <a:bodyPr wrap="square" lIns="0" tIns="0" rIns="0" bIns="0" rtlCol="0" anchor="t"/>
+          <a:lstStyle/>
+          <a:p>
+            <a:pPr algn="l" marL="342900" indent="-342900">
+              <a:lnSpc>
+                <a:spcPts val="1620"/>
+              </a:lnSpc>
+              <a:spcAft>
+                <a:spcPts val="300"/>
+              </a:spcAft>
+              <a:buSzPct val="100000"/>
+              <a:buChar char="•"/>
             </a:pPr>
             <a:r>
               <a:rPr lang="en-US" sz="1200" dirty="0">
@@ -5178,15 +6200,183 @@
                 <a:ea typeface="Georgia" pitchFamily="34" charset="-122"/>
                 <a:cs typeface="Georgia" pitchFamily="34" charset="-120"/>
               </a:rPr>
-              <a:t> – Preview tomorrow.</a:t>
+              <a:t>Pañcagavya kitchen science → SUBSTITUTED with fermented-foods study (safety)</a:t>
             </a:r>
             <a:endParaRPr lang="en-US" sz="1200" dirty="0"/>
           </a:p>
-        </p:txBody>
-      </p:sp>
-      <p:sp>
-        <p:nvSpPr>
-          <p:cNvPr id="5" name="Text 3"/>
+          <a:p>
+            <a:pPr algn="l" marL="342900" indent="-342900">
+              <a:lnSpc>
+                <a:spcPts val="1620"/>
+              </a:lnSpc>
+              <a:spcAft>
+                <a:spcPts val="300"/>
+              </a:spcAft>
+              <a:buSzPct val="100000"/>
+              <a:buChar char="•"/>
+            </a:pPr>
+            <a:r>
+              <a:rPr lang="en-US" sz="1200" dirty="0">
+                <a:solidFill>
+                  <a:srgbClr val="1A1A1A"/>
+                </a:solidFill>
+                <a:latin typeface="Georgia" pitchFamily="34" charset="0"/>
+                <a:ea typeface="Georgia" pitchFamily="34" charset="-122"/>
+                <a:cs typeface="Georgia" pitchFamily="34" charset="-120"/>
+              </a:rPr>
+              <a:t>Mandala / Pṛthvī geometry</a:t>
+            </a:r>
+            <a:endParaRPr lang="en-US" sz="1200" dirty="0"/>
+          </a:p>
+          <a:p>
+            <a:pPr algn="l" marL="342900" indent="-342900">
+              <a:lnSpc>
+                <a:spcPts val="1620"/>
+              </a:lnSpc>
+              <a:spcAft>
+                <a:spcPts val="300"/>
+              </a:spcAft>
+              <a:buSzPct val="100000"/>
+              <a:buChar char="•"/>
+            </a:pPr>
+            <a:r>
+              <a:rPr lang="en-US" sz="1200" dirty="0">
+                <a:solidFill>
+                  <a:srgbClr val="1A1A1A"/>
+                </a:solidFill>
+                <a:latin typeface="Georgia" pitchFamily="34" charset="0"/>
+                <a:ea typeface="Georgia" pitchFamily="34" charset="-122"/>
+                <a:cs typeface="Georgia" pitchFamily="34" charset="-120"/>
+              </a:rPr>
+              <a:t>Tithi/festival calendar</a:t>
+            </a:r>
+            <a:endParaRPr lang="en-US" sz="1200" dirty="0"/>
+          </a:p>
+          <a:p>
+            <a:pPr algn="l" marL="342900" indent="-342900">
+              <a:lnSpc>
+                <a:spcPts val="1620"/>
+              </a:lnSpc>
+              <a:spcAft>
+                <a:spcPts val="300"/>
+              </a:spcAft>
+              <a:buSzPct val="100000"/>
+              <a:buChar char="•"/>
+            </a:pPr>
+            <a:r>
+              <a:rPr lang="en-US" sz="1200" dirty="0">
+                <a:solidFill>
+                  <a:srgbClr val="1A1A1A"/>
+                </a:solidFill>
+                <a:latin typeface="Georgia" pitchFamily="34" charset="0"/>
+                <a:ea typeface="Georgia" pitchFamily="34" charset="-122"/>
+                <a:cs typeface="Georgia" pitchFamily="34" charset="-120"/>
+              </a:rPr>
+              <a:t>Herb identification card-deck</a:t>
+            </a:r>
+            <a:endParaRPr lang="en-US" sz="1200" dirty="0"/>
+          </a:p>
+          <a:p>
+            <a:pPr algn="l" marL="342900" indent="-342900">
+              <a:lnSpc>
+                <a:spcPts val="1620"/>
+              </a:lnSpc>
+              <a:spcAft>
+                <a:spcPts val="300"/>
+              </a:spcAft>
+              <a:buSzPct val="100000"/>
+              <a:buChar char="•"/>
+            </a:pPr>
+            <a:r>
+              <a:rPr lang="en-US" sz="1200" dirty="0">
+                <a:solidFill>
+                  <a:srgbClr val="1A1A1A"/>
+                </a:solidFill>
+                <a:latin typeface="Georgia" pitchFamily="34" charset="0"/>
+                <a:ea typeface="Georgia" pitchFamily="34" charset="-122"/>
+                <a:cs typeface="Georgia" pitchFamily="34" charset="-120"/>
+              </a:rPr>
+              <a:t>Magic-square art</a:t>
+            </a:r>
+            <a:endParaRPr lang="en-US" sz="1200" dirty="0"/>
+          </a:p>
+          <a:p>
+            <a:pPr algn="l" marL="342900" indent="-342900">
+              <a:lnSpc>
+                <a:spcPts val="1620"/>
+              </a:lnSpc>
+              <a:spcAft>
+                <a:spcPts val="300"/>
+              </a:spcAft>
+              <a:buSzPct val="100000"/>
+              <a:buChar char="•"/>
+            </a:pPr>
+            <a:r>
+              <a:rPr lang="en-US" sz="1200" dirty="0">
+                <a:solidFill>
+                  <a:srgbClr val="1A1A1A"/>
+                </a:solidFill>
+                <a:latin typeface="Georgia" pitchFamily="34" charset="0"/>
+                <a:ea typeface="Georgia" pitchFamily="34" charset="-122"/>
+                <a:cs typeface="Georgia" pitchFamily="34" charset="-120"/>
+              </a:rPr>
+              <a:t>Yoga sequence design</a:t>
+            </a:r>
+            <a:endParaRPr lang="en-US" sz="1200" dirty="0"/>
+          </a:p>
+          <a:p>
+            <a:pPr algn="l" marL="342900" indent="-342900">
+              <a:lnSpc>
+                <a:spcPts val="1620"/>
+              </a:lnSpc>
+              <a:spcAft>
+                <a:spcPts val="300"/>
+              </a:spcAft>
+              <a:buSzPct val="100000"/>
+              <a:buChar char="•"/>
+            </a:pPr>
+            <a:r>
+              <a:rPr lang="en-US" sz="1200" dirty="0">
+                <a:solidFill>
+                  <a:srgbClr val="1A1A1A"/>
+                </a:solidFill>
+                <a:latin typeface="Georgia" pitchFamily="34" charset="0"/>
+                <a:ea typeface="Georgia" pitchFamily="34" charset="-122"/>
+                <a:cs typeface="Georgia" pitchFamily="34" charset="-120"/>
+              </a:rPr>
+              <a:t>Sustainability audit</a:t>
+            </a:r>
+            <a:endParaRPr lang="en-US" sz="1200" dirty="0"/>
+          </a:p>
+          <a:p>
+            <a:pPr algn="l" marL="342900" indent="-342900">
+              <a:lnSpc>
+                <a:spcPts val="1620"/>
+              </a:lnSpc>
+              <a:spcAft>
+                <a:spcPts val="300"/>
+              </a:spcAft>
+              <a:buSzPct val="100000"/>
+              <a:buChar char="•"/>
+            </a:pPr>
+            <a:r>
+              <a:rPr lang="en-US" sz="1200" dirty="0">
+                <a:solidFill>
+                  <a:srgbClr val="1A1A1A"/>
+                </a:solidFill>
+                <a:latin typeface="Georgia" pitchFamily="34" charset="0"/>
+                <a:ea typeface="Georgia" pitchFamily="34" charset="-122"/>
+                <a:cs typeface="Georgia" pitchFamily="34" charset="-120"/>
+              </a:rPr>
+              <a:t>Doshic self-study</a:t>
+            </a:r>
+            <a:endParaRPr lang="en-US" sz="1200" dirty="0"/>
+          </a:p>
+        </p:txBody>
+      </p:sp>
+      <p:sp>
+        <p:nvSpPr>
+          <p:cNvPr id="6" name="Text 4"/>
           <p:cNvSpPr/>
           <p:nvPr/>
         </p:nvSpPr>
